--- a/HOSTELERO-Presentacion.pptx
+++ b/HOSTELERO-Presentacion.pptx
@@ -3598,8 +3598,8 @@
         </p:nvSpPr>
         <p:spPr>
           <a:xfrm>
-            <a:off x="2606040" y="960120"/>
-            <a:ext cx="1755648" cy="310896"/>
+            <a:off x="2542032" y="960120"/>
+            <a:ext cx="1847088" cy="310896"/>
           </a:xfrm>
           <a:prstGeom prst="roundRect">
             <a:avLst/>
@@ -3642,8 +3642,8 @@
         </p:nvSpPr>
         <p:spPr>
           <a:xfrm>
-            <a:off x="2606040" y="978408"/>
-            <a:ext cx="1755648" cy="274320"/>
+            <a:off x="2542032" y="978408"/>
+            <a:ext cx="1847088" cy="274320"/>
           </a:xfrm>
           <a:prstGeom prst="rect">
             <a:avLst/>
@@ -3671,7 +3671,7 @@
                 </a:solidFill>
                 <a:latin typeface="Calibri"/>
               </a:rPr>
-              <a:t>TPV DE HOSTELERÍA</a:t>
+              <a:t>360° · SIN LÍMITES</a:t>
             </a:r>
           </a:p>
         </p:txBody>
@@ -3806,7 +3806,7 @@
                 </a:solidFill>
                 <a:latin typeface="Calibri"/>
               </a:rPr>
-              <a:t>TPV · Comandera · Cocina · Administración · Carta digital · Copiloto IA</a:t>
+              <a:t>TPV · Comandera · Cocina · Administración · Carta digital · Maître IA</a:t>
             </a:r>
           </a:p>
         </p:txBody>
@@ -6060,7 +6060,7 @@
                 </a:solidFill>
                 <a:latin typeface="Calibri"/>
               </a:rPr>
-              <a:t>ABIERTO POR DISEÑO</a:t>
+              <a:t>ABIERTO POR DISEÑO · SIN LÍMITES</a:t>
             </a:r>
           </a:p>
         </p:txBody>
@@ -7224,7 +7224,7 @@
         <p:spPr>
           <a:xfrm>
             <a:off x="1920240" y="1325880"/>
-            <a:ext cx="749808" cy="310896"/>
+            <a:ext cx="1389888" cy="310896"/>
           </a:xfrm>
           <a:prstGeom prst="roundRect">
             <a:avLst/>
@@ -7268,7 +7268,7 @@
         <p:spPr>
           <a:xfrm>
             <a:off x="1920240" y="1344168"/>
-            <a:ext cx="749808" cy="274320"/>
+            <a:ext cx="1389888" cy="274320"/>
           </a:xfrm>
           <a:prstGeom prst="rect">
             <a:avLst/>
@@ -7296,7 +7296,7 @@
                 </a:solidFill>
                 <a:latin typeface="Calibri"/>
               </a:rPr>
-              <a:t>IA POS</a:t>
+              <a:t>IA POS · 360°</a:t>
             </a:r>
           </a:p>
         </p:txBody>
@@ -7431,7 +7431,7 @@
                 </a:solidFill>
                 <a:latin typeface="Calibri"/>
               </a:rPr>
-              <a:t>HOSTELERO · IA POS — el primer TPV que se piensa a sí mismo.</a:t>
+              <a:t>HOSTELERO · IA POS — el primer TPV que se piensa a sí mismo. www.hosteleroiapos.com</a:t>
             </a:r>
           </a:p>
         </p:txBody>
@@ -7600,7 +7600,7 @@
         </p:nvSpPr>
         <p:spPr>
           <a:xfrm>
-            <a:off x="640080" y="640080"/>
+            <a:off x="640080" y="594360"/>
             <a:ext cx="10058400" cy="365760"/>
           </a:xfrm>
           <a:prstGeom prst="rect">
@@ -7642,8 +7642,8 @@
         </p:nvSpPr>
         <p:spPr>
           <a:xfrm>
-            <a:off x="640080" y="1051560"/>
-            <a:ext cx="11155680" cy="1554480"/>
+            <a:off x="640080" y="960120"/>
+            <a:ext cx="11155680" cy="1097280"/>
           </a:xfrm>
           <a:prstGeom prst="rect">
             <a:avLst/>
@@ -7665,7 +7665,7 @@
               </a:spcAft>
             </a:pPr>
             <a:r>
-              <a:rPr sz="4000" b="1" i="0">
+              <a:rPr sz="3800" b="1" i="0">
                 <a:solidFill>
                   <a:srgbClr val="FFFFFF"/>
                 </a:solidFill>
@@ -7674,7 +7674,7 @@
               <a:t>No es un TPV. Es un TPV que </a:t>
             </a:r>
             <a:r>
-              <a:rPr sz="4000" b="1" i="0">
+              <a:rPr sz="3800" b="1" i="0">
                 <a:solidFill>
                   <a:srgbClr val="5EEAD4"/>
                 </a:solidFill>
@@ -7687,14 +7687,56 @@
       </p:sp>
       <p:sp>
         <p:nvSpPr>
-          <p:cNvPr id="6" name="Rounded Rectangle 5"/>
+          <p:cNvPr id="6" name="TextBox 5"/>
+          <p:cNvSpPr txBox="1"/>
+          <p:nvPr/>
+        </p:nvSpPr>
+        <p:spPr>
+          <a:xfrm>
+            <a:off x="640080" y="2148840"/>
+            <a:ext cx="10972800" cy="457200"/>
+          </a:xfrm>
+          <a:prstGeom prst="rect">
+            <a:avLst/>
+          </a:prstGeom>
+          <a:noFill/>
+        </p:spPr>
+        <p:txBody>
+          <a:bodyPr wrap="square" anchor="t" lIns="0" rIns="0" tIns="0" bIns="0">
+            <a:spAutoFit/>
+          </a:bodyPr>
+          <a:lstStyle/>
+          <a:p>
+            <a:pPr algn="l">
+              <a:spcBef>
+                <a:spcPts val="0"/>
+              </a:spcBef>
+              <a:spcAft>
+                <a:spcPts val="400"/>
+              </a:spcAft>
+            </a:pPr>
+            <a:r>
+              <a:rPr sz="1600" b="0" i="0">
+                <a:solidFill>
+                  <a:srgbClr val="CBD5E1"/>
+                </a:solidFill>
+                <a:latin typeface="Calibri"/>
+              </a:rPr>
+              <a:t>Una herramienta 360°: cubre todo el ciclo del local —venta, sala, cocina, reservas, gestión e IA— sin límites.</a:t>
+            </a:r>
+          </a:p>
+        </p:txBody>
+      </p:sp>
+      <p:sp>
+        <p:nvSpPr>
+          <p:cNvPr id="7" name="Rounded Rectangle 6"/>
           <p:cNvSpPr/>
           <p:nvPr/>
         </p:nvSpPr>
         <p:spPr>
           <a:xfrm>
-            <a:off x="640080" y="2971800"/>
-            <a:ext cx="3584448" cy="2788920"/>
+            <a:off x="640080" y="3017520"/>
+            <a:ext cx="3584448" cy="2743200"/>
           </a:xfrm>
           <a:prstGeom prst="roundRect">
             <a:avLst/>
@@ -7731,13 +7773,13 @@
       </p:sp>
       <p:sp>
         <p:nvSpPr>
-          <p:cNvPr id="7" name="TextBox 6"/>
+          <p:cNvPr id="8" name="TextBox 7"/>
           <p:cNvSpPr txBox="1"/>
           <p:nvPr/>
         </p:nvSpPr>
         <p:spPr>
           <a:xfrm>
-            <a:off x="914400" y="3200400"/>
+            <a:off x="914400" y="3246120"/>
             <a:ext cx="3108960" cy="457200"/>
           </a:xfrm>
           <a:prstGeom prst="rect">
@@ -7773,13 +7815,13 @@
       </p:sp>
       <p:sp>
         <p:nvSpPr>
-          <p:cNvPr id="8" name="TextBox 7"/>
+          <p:cNvPr id="9" name="TextBox 8"/>
           <p:cNvSpPr txBox="1"/>
           <p:nvPr/>
         </p:nvSpPr>
         <p:spPr>
           <a:xfrm>
-            <a:off x="914400" y="3794760"/>
+            <a:off x="914400" y="3840480"/>
             <a:ext cx="3072384" cy="1737360"/>
           </a:xfrm>
           <a:prstGeom prst="rect">
@@ -7802,27 +7844,27 @@
               </a:spcAft>
             </a:pPr>
             <a:r>
-              <a:rPr sz="1350" b="0" i="0">
+              <a:rPr sz="1300" b="0" i="0">
                 <a:solidFill>
                   <a:srgbClr val="CBD5E1"/>
                 </a:solidFill>
                 <a:latin typeface="Calibri"/>
               </a:rPr>
-              <a:t>Claude vive en la raíz de HOSTELERO, no es un añadido. El TPV es el sistema nervioso; la IA, la cabeza.</a:t>
-            </a:r>
-          </a:p>
-        </p:txBody>
-      </p:sp>
-      <p:sp>
-        <p:nvSpPr>
-          <p:cNvPr id="9" name="Rounded Rectangle 8"/>
+              <a:t>El Maître (IA) vive en la raíz de HOSTELERO, no es un añadido. El TPV es el sistema nervioso; la IA, la cabeza.</a:t>
+            </a:r>
+          </a:p>
+        </p:txBody>
+      </p:sp>
+      <p:sp>
+        <p:nvSpPr>
+          <p:cNvPr id="10" name="Rounded Rectangle 9"/>
           <p:cNvSpPr/>
           <p:nvPr/>
         </p:nvSpPr>
         <p:spPr>
           <a:xfrm>
-            <a:off x="4361688" y="2971800"/>
-            <a:ext cx="3584448" cy="2788920"/>
+            <a:off x="4361688" y="3017520"/>
+            <a:ext cx="3584448" cy="2743200"/>
           </a:xfrm>
           <a:prstGeom prst="roundRect">
             <a:avLst/>
@@ -7859,13 +7901,13 @@
       </p:sp>
       <p:sp>
         <p:nvSpPr>
-          <p:cNvPr id="10" name="TextBox 9"/>
+          <p:cNvPr id="11" name="TextBox 10"/>
           <p:cNvSpPr txBox="1"/>
           <p:nvPr/>
         </p:nvSpPr>
         <p:spPr>
           <a:xfrm>
-            <a:off x="4636008" y="3200400"/>
+            <a:off x="4636008" y="3246120"/>
             <a:ext cx="3108960" cy="457200"/>
           </a:xfrm>
           <a:prstGeom prst="rect">
@@ -7901,13 +7943,13 @@
       </p:sp>
       <p:sp>
         <p:nvSpPr>
-          <p:cNvPr id="11" name="TextBox 10"/>
+          <p:cNvPr id="12" name="TextBox 11"/>
           <p:cNvSpPr txBox="1"/>
           <p:nvPr/>
         </p:nvSpPr>
         <p:spPr>
           <a:xfrm>
-            <a:off x="4636008" y="3794760"/>
+            <a:off x="4636008" y="3840480"/>
             <a:ext cx="3072384" cy="1737360"/>
           </a:xfrm>
           <a:prstGeom prst="rect">
@@ -7930,27 +7972,27 @@
               </a:spcAft>
             </a:pPr>
             <a:r>
-              <a:rPr sz="1350" b="0" i="0">
+              <a:rPr sz="1300" b="0" i="0">
                 <a:solidFill>
                   <a:srgbClr val="CBD5E1"/>
                 </a:solidFill>
                 <a:latin typeface="Calibri"/>
               </a:rPr>
-              <a:t>Cada propuesta se aprueba antes de aplicarse. La IA sugiere y actúa; tú mandas. Confianza primero.</a:t>
-            </a:r>
-          </a:p>
-        </p:txBody>
-      </p:sp>
-      <p:sp>
-        <p:nvSpPr>
-          <p:cNvPr id="12" name="Rounded Rectangle 11"/>
+              <a:t>Cada propuesta se aprueba antes de aplicarse. El Maître sugiere y actúa; tú mandas. Confianza primero.</a:t>
+            </a:r>
+          </a:p>
+        </p:txBody>
+      </p:sp>
+      <p:sp>
+        <p:nvSpPr>
+          <p:cNvPr id="13" name="Rounded Rectangle 12"/>
           <p:cNvSpPr/>
           <p:nvPr/>
         </p:nvSpPr>
         <p:spPr>
           <a:xfrm>
-            <a:off x="8083296" y="2971800"/>
-            <a:ext cx="3584448" cy="2788920"/>
+            <a:off x="8083296" y="3017520"/>
+            <a:ext cx="3584448" cy="2743200"/>
           </a:xfrm>
           <a:prstGeom prst="roundRect">
             <a:avLst/>
@@ -7987,13 +8029,13 @@
       </p:sp>
       <p:sp>
         <p:nvSpPr>
-          <p:cNvPr id="13" name="TextBox 12"/>
+          <p:cNvPr id="14" name="TextBox 13"/>
           <p:cNvSpPr txBox="1"/>
           <p:nvPr/>
         </p:nvSpPr>
         <p:spPr>
           <a:xfrm>
-            <a:off x="8357616" y="3200400"/>
+            <a:off x="8357616" y="3246120"/>
             <a:ext cx="3108960" cy="457200"/>
           </a:xfrm>
           <a:prstGeom prst="rect">
@@ -8029,13 +8071,13 @@
       </p:sp>
       <p:sp>
         <p:nvSpPr>
-          <p:cNvPr id="14" name="TextBox 13"/>
+          <p:cNvPr id="15" name="TextBox 14"/>
           <p:cNvSpPr txBox="1"/>
           <p:nvPr/>
         </p:nvSpPr>
         <p:spPr>
           <a:xfrm>
-            <a:off x="8357616" y="3794760"/>
+            <a:off x="8357616" y="3840480"/>
             <a:ext cx="3072384" cy="1737360"/>
           </a:xfrm>
           <a:prstGeom prst="rect">
@@ -8058,7 +8100,7 @@
               </a:spcAft>
             </a:pPr>
             <a:r>
-              <a:rPr sz="1350" b="0" i="0">
+              <a:rPr sz="1300" b="0" i="0">
                 <a:solidFill>
                   <a:srgbClr val="CBD5E1"/>
                 </a:solidFill>
@@ -8071,7 +8113,7 @@
       </p:sp>
       <p:sp>
         <p:nvSpPr>
-          <p:cNvPr id="15" name="TextBox 14"/>
+          <p:cNvPr id="16" name="TextBox 15"/>
           <p:cNvSpPr txBox="1"/>
           <p:nvPr/>
         </p:nvSpPr>
@@ -8216,7 +8258,7 @@
                 </a:solidFill>
                 <a:latin typeface="Calibri"/>
               </a:rPr>
-              <a:t>Un TPV completo que no depende de la nube</a:t>
+              <a:t>Una herramienta 360° que no depende de la nube</a:t>
             </a:r>
           </a:p>
         </p:txBody>
@@ -8606,7 +8648,7 @@
                 </a:solidFill>
                 <a:latin typeface="Calibri"/>
               </a:rPr>
-              <a:t>escalable y adaptable al 100% de cada negocio, sin tocar el código</a:t>
+              <a:t>sin límites: escalable y adaptable al 100% de cada negocio, sin tocar el código</a:t>
             </a:r>
           </a:p>
         </p:txBody>
@@ -8799,7 +8841,7 @@
                 </a:solidFill>
                 <a:latin typeface="Calibri"/>
               </a:rPr>
-              <a:t>El Copiloto IA convierte esos datos en decisiones: precios, stock, tarifas, turnos</a:t>
+              <a:t>El Maître (IA) convierte esos datos en decisiones: precios, stock, tarifas, turnos</a:t>
             </a:r>
           </a:p>
         </p:txBody>
@@ -9815,7 +9857,7 @@
                 </a:solidFill>
                 <a:latin typeface="Calibri"/>
               </a:rPr>
-              <a:t>Carta, tarifas, reservas… y el Copiloto que optimiza todo.</a:t>
+              <a:t>Carta, tarifas, reservas… y el Maître que optimiza todo.</a:t>
             </a:r>
           </a:p>
         </p:txBody>
@@ -9967,7 +10009,7 @@
                 </a:solidFill>
                 <a:latin typeface="Calibri"/>
               </a:rPr>
-              <a:t>El Copiloto que optimiza tu negocio solo</a:t>
+              <a:t>El Maître que optimiza tu negocio solo</a:t>
             </a:r>
           </a:p>
         </p:txBody>
@@ -10190,51 +10232,7 @@
       </p:sp>
       <p:sp>
         <p:nvSpPr>
-          <p:cNvPr id="9" name="Rounded Rectangle 8"/>
-          <p:cNvSpPr/>
-          <p:nvPr/>
-        </p:nvSpPr>
-        <p:spPr>
-          <a:xfrm>
-            <a:off x="877824" y="4069080"/>
-            <a:ext cx="3108960" cy="329184"/>
-          </a:xfrm>
-          <a:prstGeom prst="roundRect">
-            <a:avLst/>
-          </a:prstGeom>
-          <a:solidFill>
-            <a:srgbClr val="FFFFFF"/>
-          </a:solidFill>
-          <a:ln>
-            <a:noFill/>
-          </a:ln>
-          <a:effectLst/>
-        </p:spPr>
-        <p:style>
-          <a:lnRef idx="1">
-            <a:schemeClr val="accent1"/>
-          </a:lnRef>
-          <a:fillRef idx="3">
-            <a:schemeClr val="accent1"/>
-          </a:fillRef>
-          <a:effectRef idx="2">
-            <a:schemeClr val="accent1"/>
-          </a:effectRef>
-          <a:fontRef idx="minor">
-            <a:schemeClr val="lt1"/>
-          </a:fontRef>
-        </p:style>
-        <p:txBody>
-          <a:bodyPr rtlCol="0" anchor="ctr"/>
-          <a:lstStyle/>
-          <a:p>
-            <a:pPr algn="ctr"/>
-          </a:p>
-        </p:txBody>
-      </p:sp>
-      <p:sp>
-        <p:nvSpPr>
-          <p:cNvPr id="10" name="TextBox 9"/>
+          <p:cNvPr id="9" name="TextBox 8"/>
           <p:cNvSpPr txBox="1"/>
           <p:nvPr/>
         </p:nvSpPr>
@@ -10276,7 +10274,7 @@
       </p:sp>
       <p:sp>
         <p:nvSpPr>
-          <p:cNvPr id="11" name="Rounded Rectangle 10"/>
+          <p:cNvPr id="10" name="Rounded Rectangle 9"/>
           <p:cNvSpPr/>
           <p:nvPr/>
         </p:nvSpPr>
@@ -10320,7 +10318,7 @@
       </p:sp>
       <p:sp>
         <p:nvSpPr>
-          <p:cNvPr id="12" name="TextBox 11"/>
+          <p:cNvPr id="11" name="TextBox 10"/>
           <p:cNvSpPr txBox="1"/>
           <p:nvPr/>
         </p:nvSpPr>
@@ -10362,7 +10360,7 @@
       </p:sp>
       <p:sp>
         <p:nvSpPr>
-          <p:cNvPr id="13" name="Rounded Rectangle 12"/>
+          <p:cNvPr id="12" name="Rounded Rectangle 11"/>
           <p:cNvSpPr/>
           <p:nvPr/>
         </p:nvSpPr>
@@ -10408,7 +10406,7 @@
       </p:sp>
       <p:sp>
         <p:nvSpPr>
-          <p:cNvPr id="14" name="Rounded Rectangle 13"/>
+          <p:cNvPr id="13" name="Rounded Rectangle 12"/>
           <p:cNvSpPr/>
           <p:nvPr/>
         </p:nvSpPr>
@@ -10452,7 +10450,7 @@
       </p:sp>
       <p:sp>
         <p:nvSpPr>
-          <p:cNvPr id="15" name="TextBox 14"/>
+          <p:cNvPr id="14" name="TextBox 13"/>
           <p:cNvSpPr txBox="1"/>
           <p:nvPr/>
         </p:nvSpPr>
@@ -10494,7 +10492,7 @@
       </p:sp>
       <p:sp>
         <p:nvSpPr>
-          <p:cNvPr id="16" name="TextBox 15"/>
+          <p:cNvPr id="15" name="TextBox 14"/>
           <p:cNvSpPr txBox="1"/>
           <p:nvPr/>
         </p:nvSpPr>
@@ -10536,7 +10534,7 @@
       </p:sp>
       <p:sp>
         <p:nvSpPr>
-          <p:cNvPr id="17" name="TextBox 16"/>
+          <p:cNvPr id="16" name="TextBox 15"/>
           <p:cNvSpPr txBox="1"/>
           <p:nvPr/>
         </p:nvSpPr>
@@ -10578,51 +10576,7 @@
       </p:sp>
       <p:sp>
         <p:nvSpPr>
-          <p:cNvPr id="18" name="Rounded Rectangle 17"/>
-          <p:cNvSpPr/>
-          <p:nvPr/>
-        </p:nvSpPr>
-        <p:spPr>
-          <a:xfrm>
-            <a:off x="4553712" y="4069080"/>
-            <a:ext cx="3108960" cy="329184"/>
-          </a:xfrm>
-          <a:prstGeom prst="roundRect">
-            <a:avLst/>
-          </a:prstGeom>
-          <a:solidFill>
-            <a:srgbClr val="FFFFFF"/>
-          </a:solidFill>
-          <a:ln>
-            <a:noFill/>
-          </a:ln>
-          <a:effectLst/>
-        </p:spPr>
-        <p:style>
-          <a:lnRef idx="1">
-            <a:schemeClr val="accent1"/>
-          </a:lnRef>
-          <a:fillRef idx="3">
-            <a:schemeClr val="accent1"/>
-          </a:fillRef>
-          <a:effectRef idx="2">
-            <a:schemeClr val="accent1"/>
-          </a:effectRef>
-          <a:fontRef idx="minor">
-            <a:schemeClr val="lt1"/>
-          </a:fontRef>
-        </p:style>
-        <p:txBody>
-          <a:bodyPr rtlCol="0" anchor="ctr"/>
-          <a:lstStyle/>
-          <a:p>
-            <a:pPr algn="ctr"/>
-          </a:p>
-        </p:txBody>
-      </p:sp>
-      <p:sp>
-        <p:nvSpPr>
-          <p:cNvPr id="19" name="TextBox 18"/>
+          <p:cNvPr id="17" name="TextBox 16"/>
           <p:cNvSpPr txBox="1"/>
           <p:nvPr/>
         </p:nvSpPr>
@@ -10664,7 +10618,7 @@
       </p:sp>
       <p:sp>
         <p:nvSpPr>
-          <p:cNvPr id="20" name="Rounded Rectangle 19"/>
+          <p:cNvPr id="18" name="Rounded Rectangle 17"/>
           <p:cNvSpPr/>
           <p:nvPr/>
         </p:nvSpPr>
@@ -10708,7 +10662,7 @@
       </p:sp>
       <p:sp>
         <p:nvSpPr>
-          <p:cNvPr id="21" name="TextBox 20"/>
+          <p:cNvPr id="19" name="TextBox 18"/>
           <p:cNvSpPr txBox="1"/>
           <p:nvPr/>
         </p:nvSpPr>
@@ -10750,7 +10704,7 @@
       </p:sp>
       <p:sp>
         <p:nvSpPr>
-          <p:cNvPr id="22" name="Rounded Rectangle 21"/>
+          <p:cNvPr id="20" name="Rounded Rectangle 19"/>
           <p:cNvSpPr/>
           <p:nvPr/>
         </p:nvSpPr>
@@ -10796,7 +10750,7 @@
       </p:sp>
       <p:sp>
         <p:nvSpPr>
-          <p:cNvPr id="23" name="Rounded Rectangle 22"/>
+          <p:cNvPr id="21" name="Rounded Rectangle 20"/>
           <p:cNvSpPr/>
           <p:nvPr/>
         </p:nvSpPr>
@@ -10840,7 +10794,7 @@
       </p:sp>
       <p:sp>
         <p:nvSpPr>
-          <p:cNvPr id="24" name="TextBox 23"/>
+          <p:cNvPr id="22" name="TextBox 21"/>
           <p:cNvSpPr txBox="1"/>
           <p:nvPr/>
         </p:nvSpPr>
@@ -10882,7 +10836,7 @@
       </p:sp>
       <p:sp>
         <p:nvSpPr>
-          <p:cNvPr id="25" name="TextBox 24"/>
+          <p:cNvPr id="23" name="TextBox 22"/>
           <p:cNvSpPr txBox="1"/>
           <p:nvPr/>
         </p:nvSpPr>
@@ -10924,7 +10878,7 @@
       </p:sp>
       <p:sp>
         <p:nvSpPr>
-          <p:cNvPr id="26" name="TextBox 25"/>
+          <p:cNvPr id="24" name="TextBox 23"/>
           <p:cNvSpPr txBox="1"/>
           <p:nvPr/>
         </p:nvSpPr>
@@ -10966,51 +10920,7 @@
       </p:sp>
       <p:sp>
         <p:nvSpPr>
-          <p:cNvPr id="27" name="Rounded Rectangle 26"/>
-          <p:cNvSpPr/>
-          <p:nvPr/>
-        </p:nvSpPr>
-        <p:spPr>
-          <a:xfrm>
-            <a:off x="8229600" y="4069080"/>
-            <a:ext cx="3108960" cy="329184"/>
-          </a:xfrm>
-          <a:prstGeom prst="roundRect">
-            <a:avLst/>
-          </a:prstGeom>
-          <a:solidFill>
-            <a:srgbClr val="FFFFFF"/>
-          </a:solidFill>
-          <a:ln>
-            <a:noFill/>
-          </a:ln>
-          <a:effectLst/>
-        </p:spPr>
-        <p:style>
-          <a:lnRef idx="1">
-            <a:schemeClr val="accent1"/>
-          </a:lnRef>
-          <a:fillRef idx="3">
-            <a:schemeClr val="accent1"/>
-          </a:fillRef>
-          <a:effectRef idx="2">
-            <a:schemeClr val="accent1"/>
-          </a:effectRef>
-          <a:fontRef idx="minor">
-            <a:schemeClr val="lt1"/>
-          </a:fontRef>
-        </p:style>
-        <p:txBody>
-          <a:bodyPr rtlCol="0" anchor="ctr"/>
-          <a:lstStyle/>
-          <a:p>
-            <a:pPr algn="ctr"/>
-          </a:p>
-        </p:txBody>
-      </p:sp>
-      <p:sp>
-        <p:nvSpPr>
-          <p:cNvPr id="28" name="TextBox 27"/>
+          <p:cNvPr id="25" name="TextBox 24"/>
           <p:cNvSpPr txBox="1"/>
           <p:nvPr/>
         </p:nvSpPr>
@@ -11052,7 +10962,7 @@
       </p:sp>
       <p:sp>
         <p:nvSpPr>
-          <p:cNvPr id="29" name="Rounded Rectangle 28"/>
+          <p:cNvPr id="26" name="Rounded Rectangle 25"/>
           <p:cNvSpPr/>
           <p:nvPr/>
         </p:nvSpPr>
@@ -11096,7 +11006,7 @@
       </p:sp>
       <p:sp>
         <p:nvSpPr>
-          <p:cNvPr id="30" name="TextBox 29"/>
+          <p:cNvPr id="27" name="TextBox 26"/>
           <p:cNvSpPr txBox="1"/>
           <p:nvPr/>
         </p:nvSpPr>
@@ -11138,7 +11048,7 @@
       </p:sp>
       <p:sp>
         <p:nvSpPr>
-          <p:cNvPr id="31" name="Rounded Rectangle 30"/>
+          <p:cNvPr id="28" name="Rounded Rectangle 27"/>
           <p:cNvSpPr/>
           <p:nvPr/>
         </p:nvSpPr>
@@ -11182,7 +11092,7 @@
       </p:sp>
       <p:sp>
         <p:nvSpPr>
-          <p:cNvPr id="32" name="TextBox 31"/>
+          <p:cNvPr id="29" name="TextBox 28"/>
           <p:cNvSpPr txBox="1"/>
           <p:nvPr/>
         </p:nvSpPr>
@@ -11226,14 +11136,14 @@
                 </a:solidFill>
                 <a:latin typeface="Calibri"/>
               </a:rPr>
-              <a:t>proponen y ejecutan. Tú apruebas con un clic, el Copiloto aplica el cambio.</a:t>
-            </a:r>
-          </a:p>
-        </p:txBody>
-      </p:sp>
-      <p:sp>
-        <p:nvSpPr>
-          <p:cNvPr id="33" name="TextBox 32"/>
+              <a:t>proponen y ejecutan. Tú apruebas con un clic, el Maître aplica el cambio.</a:t>
+            </a:r>
+          </a:p>
+        </p:txBody>
+      </p:sp>
+      <p:sp>
+        <p:nvSpPr>
+          <p:cNvPr id="30" name="TextBox 29"/>
           <p:cNvSpPr txBox="1"/>
           <p:nvPr/>
         </p:nvSpPr>
@@ -11378,7 +11288,7 @@
                 </a:solidFill>
                 <a:latin typeface="Calibri"/>
               </a:rPr>
-              <a:t>Un Copiloto para cada puesto, según permisos</a:t>
+              <a:t>Un Maître para cada puesto, según permisos</a:t>
             </a:r>
           </a:p>
         </p:txBody>

--- a/HOSTELERO-Presentacion.pptx
+++ b/HOSTELERO-Presentacion.pptx
@@ -7431,7 +7431,7 @@
                 </a:solidFill>
                 <a:latin typeface="Calibri"/>
               </a:rPr>
-              <a:t>HOSTELERO · IA POS — el primer TPV que se piensa a sí mismo. www.hosteleroiapos.com</a:t>
+              <a:t>HOSTELERO · IA POS — www.hosteleroiapos.com</a:t>
             </a:r>
           </a:p>
         </p:txBody>
@@ -7600,7 +7600,7 @@
         </p:nvSpPr>
         <p:spPr>
           <a:xfrm>
-            <a:off x="640080" y="594360"/>
+            <a:off x="640080" y="566928"/>
             <a:ext cx="10058400" cy="365760"/>
           </a:xfrm>
           <a:prstGeom prst="rect">
@@ -7642,8 +7642,8 @@
         </p:nvSpPr>
         <p:spPr>
           <a:xfrm>
-            <a:off x="640080" y="960120"/>
-            <a:ext cx="11155680" cy="1097280"/>
+            <a:off x="640080" y="932688"/>
+            <a:ext cx="11338560" cy="1097280"/>
           </a:xfrm>
           <a:prstGeom prst="rect">
             <a:avLst/>
@@ -7665,22 +7665,22 @@
               </a:spcAft>
             </a:pPr>
             <a:r>
-              <a:rPr sz="3800" b="1" i="0">
+              <a:rPr sz="3700" b="1" i="0">
                 <a:solidFill>
                   <a:srgbClr val="FFFFFF"/>
                 </a:solidFill>
                 <a:latin typeface="Calibri"/>
               </a:rPr>
-              <a:t>No es un TPV. Es un TPV que </a:t>
-            </a:r>
-            <a:r>
-              <a:rPr sz="3800" b="1" i="0">
+              <a:t>No es un TPV con IA. Es </a:t>
+            </a:r>
+            <a:r>
+              <a:rPr sz="3700" b="1" i="0">
                 <a:solidFill>
                   <a:srgbClr val="5EEAD4"/>
                 </a:solidFill>
                 <a:latin typeface="Calibri"/>
               </a:rPr>
-              <a:t>se piensa a sí mismo.</a:t>
+              <a:t>IA con forma de TPV.</a:t>
             </a:r>
           </a:p>
         </p:txBody>
@@ -7693,8 +7693,8 @@
         </p:nvSpPr>
         <p:spPr>
           <a:xfrm>
-            <a:off x="640080" y="2148840"/>
-            <a:ext cx="10972800" cy="457200"/>
+            <a:off x="640080" y="2121408"/>
+            <a:ext cx="10972800" cy="548640"/>
           </a:xfrm>
           <a:prstGeom prst="rect">
             <a:avLst/>
@@ -7716,13 +7716,13 @@
               </a:spcAft>
             </a:pPr>
             <a:r>
-              <a:rPr sz="1600" b="0" i="0">
+              <a:rPr sz="1500" b="0" i="0">
                 <a:solidFill>
                   <a:srgbClr val="CBD5E1"/>
                 </a:solidFill>
                 <a:latin typeface="Calibri"/>
               </a:rPr>
-              <a:t>Una herramienta 360°: cubre todo el ciclo del local —venta, sala, cocina, reservas, gestión e IA— sin límites.</a:t>
+              <a:t>El Maître es el cerebro y el gerente de tu local — no una utilidad de moda pegada a un POS. Si le quitas la IA, no queda un TPV con menos funciones: queda un cuerpo sin cabeza.</a:t>
             </a:r>
           </a:p>
         </p:txBody>
@@ -7735,8 +7735,8 @@
         </p:nvSpPr>
         <p:spPr>
           <a:xfrm>
-            <a:off x="640080" y="3017520"/>
-            <a:ext cx="3584448" cy="2743200"/>
+            <a:off x="640080" y="3154680"/>
+            <a:ext cx="3584448" cy="2697480"/>
           </a:xfrm>
           <a:prstGeom prst="roundRect">
             <a:avLst/>
@@ -7779,7 +7779,7 @@
         </p:nvSpPr>
         <p:spPr>
           <a:xfrm>
-            <a:off x="914400" y="3246120"/>
+            <a:off x="914400" y="3364992"/>
             <a:ext cx="3108960" cy="457200"/>
           </a:xfrm>
           <a:prstGeom prst="rect">
@@ -7802,13 +7802,13 @@
               </a:spcAft>
             </a:pPr>
             <a:r>
-              <a:rPr sz="1800" b="1" i="0">
+              <a:rPr sz="1700" b="1" i="0">
                 <a:solidFill>
                   <a:srgbClr val="FFFFFF"/>
                 </a:solidFill>
                 <a:latin typeface="Calibri"/>
               </a:rPr>
-              <a:t>La IA es el núcleo</a:t>
+              <a:t>El cerebro y el gerente</a:t>
             </a:r>
           </a:p>
         </p:txBody>
@@ -7821,7 +7821,7 @@
         </p:nvSpPr>
         <p:spPr>
           <a:xfrm>
-            <a:off x="914400" y="3840480"/>
+            <a:off x="914400" y="3931920"/>
             <a:ext cx="3072384" cy="1737360"/>
           </a:xfrm>
           <a:prstGeom prst="rect">
@@ -7844,13 +7844,13 @@
               </a:spcAft>
             </a:pPr>
             <a:r>
-              <a:rPr sz="1300" b="0" i="0">
+              <a:rPr sz="1250" b="0" i="0">
                 <a:solidFill>
                   <a:srgbClr val="CBD5E1"/>
                 </a:solidFill>
                 <a:latin typeface="Calibri"/>
               </a:rPr>
-              <a:t>El Maître (IA) vive en la raíz de HOSTELERO, no es un añadido. El TPV es el sistema nervioso; la IA, la cabeza.</a:t>
+              <a:t>El Maître dirige el local: el TPV, la cocina y la sala son los sentidos y las manos; la IA, la cabeza que piensa y decide.</a:t>
             </a:r>
           </a:p>
         </p:txBody>
@@ -7863,8 +7863,8 @@
         </p:nvSpPr>
         <p:spPr>
           <a:xfrm>
-            <a:off x="4361688" y="3017520"/>
-            <a:ext cx="3584448" cy="2743200"/>
+            <a:off x="4361688" y="3154680"/>
+            <a:ext cx="3584448" cy="2697480"/>
           </a:xfrm>
           <a:prstGeom prst="roundRect">
             <a:avLst/>
@@ -7907,7 +7907,7 @@
         </p:nvSpPr>
         <p:spPr>
           <a:xfrm>
-            <a:off x="4636008" y="3246120"/>
+            <a:off x="4636008" y="3364992"/>
             <a:ext cx="3108960" cy="457200"/>
           </a:xfrm>
           <a:prstGeom prst="rect">
@@ -7930,7 +7930,7 @@
               </a:spcAft>
             </a:pPr>
             <a:r>
-              <a:rPr sz="1800" b="1" i="0">
+              <a:rPr sz="1700" b="1" i="0">
                 <a:solidFill>
                   <a:srgbClr val="FFFFFF"/>
                 </a:solidFill>
@@ -7949,7 +7949,7 @@
         </p:nvSpPr>
         <p:spPr>
           <a:xfrm>
-            <a:off x="4636008" y="3840480"/>
+            <a:off x="4636008" y="3931920"/>
             <a:ext cx="3072384" cy="1737360"/>
           </a:xfrm>
           <a:prstGeom prst="rect">
@@ -7972,13 +7972,13 @@
               </a:spcAft>
             </a:pPr>
             <a:r>
-              <a:rPr sz="1300" b="0" i="0">
+              <a:rPr sz="1250" b="0" i="0">
                 <a:solidFill>
                   <a:srgbClr val="CBD5E1"/>
                 </a:solidFill>
                 <a:latin typeface="Calibri"/>
               </a:rPr>
-              <a:t>Cada propuesta se aprueba antes de aplicarse. El Maître sugiere y actúa; tú mandas. Confianza primero.</a:t>
+              <a:t>Propone y actúa en tiempo real. La última palabra siempre es tuya. Confianza primero.</a:t>
             </a:r>
           </a:p>
         </p:txBody>
@@ -7991,8 +7991,8 @@
         </p:nvSpPr>
         <p:spPr>
           <a:xfrm>
-            <a:off x="8083296" y="3017520"/>
-            <a:ext cx="3584448" cy="2743200"/>
+            <a:off x="8083296" y="3154680"/>
+            <a:ext cx="3584448" cy="2697480"/>
           </a:xfrm>
           <a:prstGeom prst="roundRect">
             <a:avLst/>
@@ -8035,7 +8035,7 @@
         </p:nvSpPr>
         <p:spPr>
           <a:xfrm>
-            <a:off x="8357616" y="3246120"/>
+            <a:off x="8357616" y="3364992"/>
             <a:ext cx="3108960" cy="457200"/>
           </a:xfrm>
           <a:prstGeom prst="rect">
@@ -8058,13 +8058,13 @@
               </a:spcAft>
             </a:pPr>
             <a:r>
-              <a:rPr sz="1800" b="1" i="0">
+              <a:rPr sz="1700" b="1" i="0">
                 <a:solidFill>
                   <a:srgbClr val="FFFFFF"/>
                 </a:solidFill>
                 <a:latin typeface="Calibri"/>
               </a:rPr>
-              <a:t>Crece contigo</a:t>
+              <a:t>Omnipresente</a:t>
             </a:r>
           </a:p>
         </p:txBody>
@@ -8077,7 +8077,7 @@
         </p:nvSpPr>
         <p:spPr>
           <a:xfrm>
-            <a:off x="8357616" y="3840480"/>
+            <a:off x="8357616" y="3931920"/>
             <a:ext cx="3072384" cy="1737360"/>
           </a:xfrm>
           <a:prstGeom prst="rect">
@@ -8100,13 +8100,13 @@
               </a:spcAft>
             </a:pPr>
             <a:r>
-              <a:rPr sz="1300" b="0" i="0">
+              <a:rPr sz="1250" b="0" i="0">
                 <a:solidFill>
                   <a:srgbClr val="CBD5E1"/>
                 </a:solidFill>
                 <a:latin typeface="Calibri"/>
               </a:rPr>
-              <a:t>Lee ventas, escandallo, reservas y personal en tiempo real. Cuanto más lo usas, mejor te conoce.</a:t>
+              <a:t>Vive en todas las pantallas, no en una pestaña: te avisa y propone según tu puesto.</a:t>
             </a:r>
           </a:p>
         </p:txBody>
@@ -11246,7 +11246,7 @@
                 </a:solidFill>
                 <a:latin typeface="Calibri"/>
               </a:rPr>
-              <a:t>IA PARA TODO EL EQUIPO</a:t>
+              <a:t>IA PARA TODO EL EQUIPO · EN TODA PANTALLA</a:t>
             </a:r>
           </a:p>
         </p:txBody>

--- a/HOSTELERO-Presentacion.pptx
+++ b/HOSTELERO-Presentacion.pptx
@@ -17,6 +17,7 @@
     <p:sldId id="265" r:id="rId16"/>
     <p:sldId id="266" r:id="rId17"/>
     <p:sldId id="267" r:id="rId18"/>
+    <p:sldId id="269" r:id="rId20"/>
     <p:sldId id="268" r:id="rId19"/>
   </p:sldIdLst>
   <p:sldSz cx="12191695" cy="6858000" type="screen4x3"/>
@@ -7466,6 +7467,1983 @@
                 <a:spcPts val="400"/>
               </a:spcAft>
             </a:pPr>
+            <a:r>
+              <a:rPr sz="900" b="0" i="0">
+                <a:solidFill>
+                  <a:srgbClr val="475569"/>
+                </a:solidFill>
+                <a:latin typeface="Calibri"/>
+              </a:rPr>
+              <a:t>© 2026 HOSTELERO · IA POS — Todos los derechos reservados · Documento confidencial</a:t>
+            </a:r>
+          </a:p>
+        </p:txBody>
+      </p:sp>
+    </p:spTree>
+  </p:cSld>
+  <p:clrMapOvr>
+    <a:masterClrMapping/>
+  </p:clrMapOvr>
+</p:sld>
+</file>
+
+<file path=ppt/slides/slide14.xml><?xml version="1.0" encoding="utf-8"?>
+<p:sld xmlns:a="http://schemas.openxmlformats.org/drawingml/2006/main" xmlns:p="http://schemas.openxmlformats.org/presentationml/2006/main" xmlns:r="http://schemas.openxmlformats.org/officeDocument/2006/relationships">
+  <p:cSld>
+    <p:bg>
+      <p:bgPr>
+        <a:solidFill>
+          <a:srgbClr val="F8FAFC"/>
+        </a:solidFill>
+        <a:effectLst/>
+      </p:bgPr>
+    </p:bg>
+    <p:spTree>
+      <p:nvGrpSpPr>
+        <p:cNvPr id="1" name=""/>
+        <p:cNvGrpSpPr/>
+        <p:nvPr/>
+      </p:nvGrpSpPr>
+      <p:grpSpPr/>
+      <p:sp>
+        <p:nvSpPr>
+          <p:cNvPr id="2" name="TextBox 1"/>
+          <p:cNvSpPr txBox="1"/>
+          <p:nvPr/>
+        </p:nvSpPr>
+        <p:spPr>
+          <a:xfrm>
+            <a:off x="640080" y="457200"/>
+            <a:ext cx="10058400" cy="274320"/>
+          </a:xfrm>
+          <a:prstGeom prst="rect">
+            <a:avLst/>
+          </a:prstGeom>
+          <a:noFill/>
+        </p:spPr>
+        <p:txBody>
+          <a:bodyPr wrap="square" anchor="t" lIns="0" rIns="0" tIns="0" bIns="0">
+            <a:spAutoFit/>
+          </a:bodyPr>
+          <a:lstStyle/>
+          <a:p>
+            <a:pPr algn="l"/>
+            <a:r>
+              <a:rPr sz="1300" b="1" i="0">
+                <a:solidFill>
+                  <a:srgbClr val="0F766E"/>
+                </a:solidFill>
+                <a:latin typeface="Calibri"/>
+              </a:rPr>
+              <a:t>DE CARA AL CLIENTE</a:t>
+            </a:r>
+          </a:p>
+        </p:txBody>
+      </p:sp>
+      <p:sp>
+        <p:nvSpPr>
+          <p:cNvPr id="3" name="TextBox 2"/>
+          <p:cNvSpPr txBox="1"/>
+          <p:nvPr/>
+        </p:nvSpPr>
+        <p:spPr>
+          <a:xfrm>
+            <a:off x="640080" y="749808"/>
+            <a:ext cx="10972800" cy="822960"/>
+          </a:xfrm>
+          <a:prstGeom prst="rect">
+            <a:avLst/>
+          </a:prstGeom>
+          <a:noFill/>
+        </p:spPr>
+        <p:txBody>
+          <a:bodyPr wrap="square" anchor="t" lIns="0" rIns="0" tIns="0" bIns="0">
+            <a:spAutoFit/>
+          </a:bodyPr>
+          <a:lstStyle/>
+          <a:p>
+            <a:pPr algn="l"/>
+            <a:r>
+              <a:rPr sz="3300" b="1" i="0">
+                <a:solidFill>
+                  <a:srgbClr val="1E293B"/>
+                </a:solidFill>
+                <a:latin typeface="Calibri"/>
+              </a:rPr>
+              <a:t>La carta digital que enamora — y reserva sola</a:t>
+            </a:r>
+          </a:p>
+        </p:txBody>
+      </p:sp>
+      <p:sp>
+        <p:nvSpPr>
+          <p:cNvPr id="4" name="Rounded Rectangle 3"/>
+          <p:cNvSpPr/>
+          <p:nvPr/>
+        </p:nvSpPr>
+        <p:spPr>
+          <a:xfrm>
+            <a:off x="822960" y="1783080"/>
+            <a:ext cx="2834640" cy="4297680"/>
+          </a:xfrm>
+          <a:prstGeom prst="roundRect">
+            <a:avLst/>
+          </a:prstGeom>
+          <a:solidFill>
+            <a:srgbClr val="0F172A"/>
+          </a:solidFill>
+          <a:ln>
+            <a:noFill/>
+          </a:ln>
+          <a:effectLst/>
+        </p:spPr>
+        <p:style>
+          <a:lnRef idx="1">
+            <a:schemeClr val="accent1"/>
+          </a:lnRef>
+          <a:fillRef idx="3">
+            <a:schemeClr val="accent1"/>
+          </a:fillRef>
+          <a:effectRef idx="2">
+            <a:schemeClr val="accent1"/>
+          </a:effectRef>
+          <a:fontRef idx="minor">
+            <a:schemeClr val="lt1"/>
+          </a:fontRef>
+        </p:style>
+        <p:txBody>
+          <a:bodyPr rtlCol="0" anchor="ctr"/>
+          <a:lstStyle/>
+          <a:p>
+            <a:pPr algn="ctr"/>
+          </a:p>
+        </p:txBody>
+      </p:sp>
+      <p:sp>
+        <p:nvSpPr>
+          <p:cNvPr id="5" name="Rounded Rectangle 4"/>
+          <p:cNvSpPr/>
+          <p:nvPr/>
+        </p:nvSpPr>
+        <p:spPr>
+          <a:xfrm>
+            <a:off x="932688" y="1892807"/>
+            <a:ext cx="2615184" cy="4078224"/>
+          </a:xfrm>
+          <a:prstGeom prst="roundRect">
+            <a:avLst/>
+          </a:prstGeom>
+          <a:solidFill>
+            <a:srgbClr val="FBF7F0"/>
+          </a:solidFill>
+          <a:ln>
+            <a:noFill/>
+          </a:ln>
+          <a:effectLst/>
+        </p:spPr>
+        <p:style>
+          <a:lnRef idx="1">
+            <a:schemeClr val="accent1"/>
+          </a:lnRef>
+          <a:fillRef idx="3">
+            <a:schemeClr val="accent1"/>
+          </a:fillRef>
+          <a:effectRef idx="2">
+            <a:schemeClr val="accent1"/>
+          </a:effectRef>
+          <a:fontRef idx="minor">
+            <a:schemeClr val="lt1"/>
+          </a:fontRef>
+        </p:style>
+        <p:txBody>
+          <a:bodyPr rtlCol="0" anchor="ctr"/>
+          <a:lstStyle/>
+          <a:p>
+            <a:pPr algn="ctr"/>
+          </a:p>
+        </p:txBody>
+      </p:sp>
+      <p:sp>
+        <p:nvSpPr>
+          <p:cNvPr id="6" name="Rounded Rectangle 5"/>
+          <p:cNvSpPr/>
+          <p:nvPr/>
+        </p:nvSpPr>
+        <p:spPr>
+          <a:xfrm>
+            <a:off x="932688" y="1892807"/>
+            <a:ext cx="2615184" cy="1051560"/>
+          </a:xfrm>
+          <a:prstGeom prst="roundRect">
+            <a:avLst/>
+          </a:prstGeom>
+          <a:solidFill>
+            <a:srgbClr val="B4532A"/>
+          </a:solidFill>
+          <a:ln>
+            <a:noFill/>
+          </a:ln>
+          <a:effectLst/>
+        </p:spPr>
+        <p:style>
+          <a:lnRef idx="1">
+            <a:schemeClr val="accent1"/>
+          </a:lnRef>
+          <a:fillRef idx="3">
+            <a:schemeClr val="accent1"/>
+          </a:fillRef>
+          <a:effectRef idx="2">
+            <a:schemeClr val="accent1"/>
+          </a:effectRef>
+          <a:fontRef idx="minor">
+            <a:schemeClr val="lt1"/>
+          </a:fontRef>
+        </p:style>
+        <p:txBody>
+          <a:bodyPr rtlCol="0" anchor="ctr"/>
+          <a:lstStyle/>
+          <a:p>
+            <a:pPr algn="ctr"/>
+          </a:p>
+        </p:txBody>
+      </p:sp>
+      <p:sp>
+        <p:nvSpPr>
+          <p:cNvPr id="7" name="TextBox 6"/>
+          <p:cNvSpPr txBox="1"/>
+          <p:nvPr/>
+        </p:nvSpPr>
+        <p:spPr>
+          <a:xfrm>
+            <a:off x="1115568" y="2240280"/>
+            <a:ext cx="2286000" cy="365760"/>
+          </a:xfrm>
+          <a:prstGeom prst="rect">
+            <a:avLst/>
+          </a:prstGeom>
+          <a:noFill/>
+        </p:spPr>
+        <p:txBody>
+          <a:bodyPr wrap="square" anchor="t" lIns="0" rIns="0" tIns="0" bIns="0">
+            <a:spAutoFit/>
+          </a:bodyPr>
+          <a:lstStyle/>
+          <a:p>
+            <a:pPr algn="l"/>
+            <a:r>
+              <a:rPr sz="1600" b="1" i="0">
+                <a:solidFill>
+                  <a:srgbClr val="FFFFFF"/>
+                </a:solidFill>
+                <a:latin typeface="Calibri"/>
+              </a:rPr>
+              <a:t>La Taberna</a:t>
+            </a:r>
+          </a:p>
+        </p:txBody>
+      </p:sp>
+      <p:sp>
+        <p:nvSpPr>
+          <p:cNvPr id="8" name="TextBox 7"/>
+          <p:cNvSpPr txBox="1"/>
+          <p:nvPr/>
+        </p:nvSpPr>
+        <p:spPr>
+          <a:xfrm>
+            <a:off x="1115568" y="2569464"/>
+            <a:ext cx="2286000" cy="274320"/>
+          </a:xfrm>
+          <a:prstGeom prst="rect">
+            <a:avLst/>
+          </a:prstGeom>
+          <a:noFill/>
+        </p:spPr>
+        <p:txBody>
+          <a:bodyPr wrap="square" anchor="t" lIns="0" rIns="0" tIns="0" bIns="0">
+            <a:spAutoFit/>
+          </a:bodyPr>
+          <a:lstStyle/>
+          <a:p>
+            <a:pPr algn="l"/>
+            <a:r>
+              <a:rPr sz="900" b="1" i="0">
+                <a:solidFill>
+                  <a:srgbClr val="F0C89A"/>
+                </a:solidFill>
+                <a:latin typeface="Calibri"/>
+              </a:rPr>
+              <a:t>CARTA DIGITAL</a:t>
+            </a:r>
+          </a:p>
+        </p:txBody>
+      </p:sp>
+      <p:sp>
+        <p:nvSpPr>
+          <p:cNvPr id="9" name="Rounded Rectangle 8"/>
+          <p:cNvSpPr/>
+          <p:nvPr/>
+        </p:nvSpPr>
+        <p:spPr>
+          <a:xfrm>
+            <a:off x="1078992" y="3154680"/>
+            <a:ext cx="566928" cy="566928"/>
+          </a:xfrm>
+          <a:prstGeom prst="roundRect">
+            <a:avLst/>
+          </a:prstGeom>
+          <a:solidFill>
+            <a:srgbClr val="7C3AED"/>
+          </a:solidFill>
+          <a:ln>
+            <a:noFill/>
+          </a:ln>
+          <a:effectLst/>
+        </p:spPr>
+        <p:style>
+          <a:lnRef idx="1">
+            <a:schemeClr val="accent1"/>
+          </a:lnRef>
+          <a:fillRef idx="3">
+            <a:schemeClr val="accent1"/>
+          </a:fillRef>
+          <a:effectRef idx="2">
+            <a:schemeClr val="accent1"/>
+          </a:effectRef>
+          <a:fontRef idx="minor">
+            <a:schemeClr val="lt1"/>
+          </a:fontRef>
+        </p:style>
+        <p:txBody>
+          <a:bodyPr rtlCol="0" anchor="ctr"/>
+          <a:lstStyle/>
+          <a:p>
+            <a:pPr algn="ctr"/>
+          </a:p>
+        </p:txBody>
+      </p:sp>
+      <p:sp>
+        <p:nvSpPr>
+          <p:cNvPr id="10" name="TextBox 9"/>
+          <p:cNvSpPr txBox="1"/>
+          <p:nvPr/>
+        </p:nvSpPr>
+        <p:spPr>
+          <a:xfrm>
+            <a:off x="1755648" y="3209544"/>
+            <a:ext cx="1371600" cy="274320"/>
+          </a:xfrm>
+          <a:prstGeom prst="rect">
+            <a:avLst/>
+          </a:prstGeom>
+          <a:noFill/>
+        </p:spPr>
+        <p:txBody>
+          <a:bodyPr wrap="square" anchor="t" lIns="0" rIns="0" tIns="0" bIns="0">
+            <a:spAutoFit/>
+          </a:bodyPr>
+          <a:lstStyle/>
+          <a:p>
+            <a:pPr algn="l"/>
+            <a:r>
+              <a:rPr sz="1200" b="1" i="0">
+                <a:solidFill>
+                  <a:srgbClr val="1E293B"/>
+                </a:solidFill>
+                <a:latin typeface="Calibri"/>
+              </a:rPr>
+              <a:t>Entrecot</a:t>
+            </a:r>
+          </a:p>
+        </p:txBody>
+      </p:sp>
+      <p:sp>
+        <p:nvSpPr>
+          <p:cNvPr id="11" name="TextBox 10"/>
+          <p:cNvSpPr txBox="1"/>
+          <p:nvPr/>
+        </p:nvSpPr>
+        <p:spPr>
+          <a:xfrm>
+            <a:off x="1755648" y="3465576"/>
+            <a:ext cx="1463040" cy="228600"/>
+          </a:xfrm>
+          <a:prstGeom prst="rect">
+            <a:avLst/>
+          </a:prstGeom>
+          <a:noFill/>
+        </p:spPr>
+        <p:txBody>
+          <a:bodyPr wrap="square" anchor="t" lIns="0" rIns="0" tIns="0" bIns="0">
+            <a:spAutoFit/>
+          </a:bodyPr>
+          <a:lstStyle/>
+          <a:p>
+            <a:pPr algn="l"/>
+            <a:r>
+              <a:rPr sz="850" b="0" i="0">
+                <a:solidFill>
+                  <a:srgbClr val="64748B"/>
+                </a:solidFill>
+                <a:latin typeface="Calibri"/>
+              </a:rPr>
+              <a:t>con foto y descripción</a:t>
+            </a:r>
+          </a:p>
+        </p:txBody>
+      </p:sp>
+      <p:sp>
+        <p:nvSpPr>
+          <p:cNvPr id="12" name="TextBox 11"/>
+          <p:cNvSpPr txBox="1"/>
+          <p:nvPr/>
+        </p:nvSpPr>
+        <p:spPr>
+          <a:xfrm>
+            <a:off x="2788920" y="3264408"/>
+            <a:ext cx="640080" cy="274320"/>
+          </a:xfrm>
+          <a:prstGeom prst="rect">
+            <a:avLst/>
+          </a:prstGeom>
+          <a:noFill/>
+        </p:spPr>
+        <p:txBody>
+          <a:bodyPr wrap="square" anchor="t" lIns="0" rIns="0" tIns="0" bIns="0">
+            <a:spAutoFit/>
+          </a:bodyPr>
+          <a:lstStyle/>
+          <a:p>
+            <a:pPr algn="r"/>
+            <a:r>
+              <a:rPr sz="1100" b="1" i="0">
+                <a:solidFill>
+                  <a:srgbClr val="B4532A"/>
+                </a:solidFill>
+                <a:latin typeface="Calibri"/>
+              </a:rPr>
+              <a:t>18,00 €</a:t>
+            </a:r>
+          </a:p>
+        </p:txBody>
+      </p:sp>
+      <p:sp>
+        <p:nvSpPr>
+          <p:cNvPr id="13" name="Rounded Rectangle 12"/>
+          <p:cNvSpPr/>
+          <p:nvPr/>
+        </p:nvSpPr>
+        <p:spPr>
+          <a:xfrm>
+            <a:off x="1078992" y="3867912"/>
+            <a:ext cx="566928" cy="566928"/>
+          </a:xfrm>
+          <a:prstGeom prst="roundRect">
+            <a:avLst/>
+          </a:prstGeom>
+          <a:solidFill>
+            <a:srgbClr val="16A34A"/>
+          </a:solidFill>
+          <a:ln>
+            <a:noFill/>
+          </a:ln>
+          <a:effectLst/>
+        </p:spPr>
+        <p:style>
+          <a:lnRef idx="1">
+            <a:schemeClr val="accent1"/>
+          </a:lnRef>
+          <a:fillRef idx="3">
+            <a:schemeClr val="accent1"/>
+          </a:fillRef>
+          <a:effectRef idx="2">
+            <a:schemeClr val="accent1"/>
+          </a:effectRef>
+          <a:fontRef idx="minor">
+            <a:schemeClr val="lt1"/>
+          </a:fontRef>
+        </p:style>
+        <p:txBody>
+          <a:bodyPr rtlCol="0" anchor="ctr"/>
+          <a:lstStyle/>
+          <a:p>
+            <a:pPr algn="ctr"/>
+          </a:p>
+        </p:txBody>
+      </p:sp>
+      <p:sp>
+        <p:nvSpPr>
+          <p:cNvPr id="14" name="TextBox 13"/>
+          <p:cNvSpPr txBox="1"/>
+          <p:nvPr/>
+        </p:nvSpPr>
+        <p:spPr>
+          <a:xfrm>
+            <a:off x="1755648" y="3922776"/>
+            <a:ext cx="1371600" cy="274320"/>
+          </a:xfrm>
+          <a:prstGeom prst="rect">
+            <a:avLst/>
+          </a:prstGeom>
+          <a:noFill/>
+        </p:spPr>
+        <p:txBody>
+          <a:bodyPr wrap="square" anchor="t" lIns="0" rIns="0" tIns="0" bIns="0">
+            <a:spAutoFit/>
+          </a:bodyPr>
+          <a:lstStyle/>
+          <a:p>
+            <a:pPr algn="l"/>
+            <a:r>
+              <a:rPr sz="1200" b="1" i="0">
+                <a:solidFill>
+                  <a:srgbClr val="1E293B"/>
+                </a:solidFill>
+                <a:latin typeface="Calibri"/>
+              </a:rPr>
+              <a:t>Paella</a:t>
+            </a:r>
+          </a:p>
+        </p:txBody>
+      </p:sp>
+      <p:sp>
+        <p:nvSpPr>
+          <p:cNvPr id="15" name="TextBox 14"/>
+          <p:cNvSpPr txBox="1"/>
+          <p:nvPr/>
+        </p:nvSpPr>
+        <p:spPr>
+          <a:xfrm>
+            <a:off x="1755648" y="4178808"/>
+            <a:ext cx="1463040" cy="228600"/>
+          </a:xfrm>
+          <a:prstGeom prst="rect">
+            <a:avLst/>
+          </a:prstGeom>
+          <a:noFill/>
+        </p:spPr>
+        <p:txBody>
+          <a:bodyPr wrap="square" anchor="t" lIns="0" rIns="0" tIns="0" bIns="0">
+            <a:spAutoFit/>
+          </a:bodyPr>
+          <a:lstStyle/>
+          <a:p>
+            <a:pPr algn="l"/>
+            <a:r>
+              <a:rPr sz="850" b="0" i="0">
+                <a:solidFill>
+                  <a:srgbClr val="64748B"/>
+                </a:solidFill>
+                <a:latin typeface="Calibri"/>
+              </a:rPr>
+              <a:t>con foto y descripción</a:t>
+            </a:r>
+          </a:p>
+        </p:txBody>
+      </p:sp>
+      <p:sp>
+        <p:nvSpPr>
+          <p:cNvPr id="16" name="TextBox 15"/>
+          <p:cNvSpPr txBox="1"/>
+          <p:nvPr/>
+        </p:nvSpPr>
+        <p:spPr>
+          <a:xfrm>
+            <a:off x="2788920" y="3977640"/>
+            <a:ext cx="640080" cy="274320"/>
+          </a:xfrm>
+          <a:prstGeom prst="rect">
+            <a:avLst/>
+          </a:prstGeom>
+          <a:noFill/>
+        </p:spPr>
+        <p:txBody>
+          <a:bodyPr wrap="square" anchor="t" lIns="0" rIns="0" tIns="0" bIns="0">
+            <a:spAutoFit/>
+          </a:bodyPr>
+          <a:lstStyle/>
+          <a:p>
+            <a:pPr algn="r"/>
+            <a:r>
+              <a:rPr sz="1100" b="1" i="0">
+                <a:solidFill>
+                  <a:srgbClr val="B4532A"/>
+                </a:solidFill>
+                <a:latin typeface="Calibri"/>
+              </a:rPr>
+              <a:t>16,00 €</a:t>
+            </a:r>
+          </a:p>
+        </p:txBody>
+      </p:sp>
+      <p:sp>
+        <p:nvSpPr>
+          <p:cNvPr id="17" name="Rounded Rectangle 16"/>
+          <p:cNvSpPr/>
+          <p:nvPr/>
+        </p:nvSpPr>
+        <p:spPr>
+          <a:xfrm>
+            <a:off x="1078992" y="4581144"/>
+            <a:ext cx="566928" cy="566928"/>
+          </a:xfrm>
+          <a:prstGeom prst="roundRect">
+            <a:avLst/>
+          </a:prstGeom>
+          <a:solidFill>
+            <a:srgbClr val="7C3AED"/>
+          </a:solidFill>
+          <a:ln>
+            <a:noFill/>
+          </a:ln>
+          <a:effectLst/>
+        </p:spPr>
+        <p:style>
+          <a:lnRef idx="1">
+            <a:schemeClr val="accent1"/>
+          </a:lnRef>
+          <a:fillRef idx="3">
+            <a:schemeClr val="accent1"/>
+          </a:fillRef>
+          <a:effectRef idx="2">
+            <a:schemeClr val="accent1"/>
+          </a:effectRef>
+          <a:fontRef idx="minor">
+            <a:schemeClr val="lt1"/>
+          </a:fontRef>
+        </p:style>
+        <p:txBody>
+          <a:bodyPr rtlCol="0" anchor="ctr"/>
+          <a:lstStyle/>
+          <a:p>
+            <a:pPr algn="ctr"/>
+          </a:p>
+        </p:txBody>
+      </p:sp>
+      <p:sp>
+        <p:nvSpPr>
+          <p:cNvPr id="18" name="TextBox 17"/>
+          <p:cNvSpPr txBox="1"/>
+          <p:nvPr/>
+        </p:nvSpPr>
+        <p:spPr>
+          <a:xfrm>
+            <a:off x="1755648" y="4636008"/>
+            <a:ext cx="1371600" cy="274320"/>
+          </a:xfrm>
+          <a:prstGeom prst="rect">
+            <a:avLst/>
+          </a:prstGeom>
+          <a:noFill/>
+        </p:spPr>
+        <p:txBody>
+          <a:bodyPr wrap="square" anchor="t" lIns="0" rIns="0" tIns="0" bIns="0">
+            <a:spAutoFit/>
+          </a:bodyPr>
+          <a:lstStyle/>
+          <a:p>
+            <a:pPr algn="l"/>
+            <a:r>
+              <a:rPr sz="1200" b="1" i="0">
+                <a:solidFill>
+                  <a:srgbClr val="1E293B"/>
+                </a:solidFill>
+                <a:latin typeface="Calibri"/>
+              </a:rPr>
+              <a:t>Pulpo</a:t>
+            </a:r>
+          </a:p>
+        </p:txBody>
+      </p:sp>
+      <p:sp>
+        <p:nvSpPr>
+          <p:cNvPr id="19" name="TextBox 18"/>
+          <p:cNvSpPr txBox="1"/>
+          <p:nvPr/>
+        </p:nvSpPr>
+        <p:spPr>
+          <a:xfrm>
+            <a:off x="1755648" y="4892040"/>
+            <a:ext cx="1463040" cy="228600"/>
+          </a:xfrm>
+          <a:prstGeom prst="rect">
+            <a:avLst/>
+          </a:prstGeom>
+          <a:noFill/>
+        </p:spPr>
+        <p:txBody>
+          <a:bodyPr wrap="square" anchor="t" lIns="0" rIns="0" tIns="0" bIns="0">
+            <a:spAutoFit/>
+          </a:bodyPr>
+          <a:lstStyle/>
+          <a:p>
+            <a:pPr algn="l"/>
+            <a:r>
+              <a:rPr sz="850" b="0" i="0">
+                <a:solidFill>
+                  <a:srgbClr val="64748B"/>
+                </a:solidFill>
+                <a:latin typeface="Calibri"/>
+              </a:rPr>
+              <a:t>con foto y descripción</a:t>
+            </a:r>
+          </a:p>
+        </p:txBody>
+      </p:sp>
+      <p:sp>
+        <p:nvSpPr>
+          <p:cNvPr id="20" name="TextBox 19"/>
+          <p:cNvSpPr txBox="1"/>
+          <p:nvPr/>
+        </p:nvSpPr>
+        <p:spPr>
+          <a:xfrm>
+            <a:off x="2788920" y="4690872"/>
+            <a:ext cx="640080" cy="274320"/>
+          </a:xfrm>
+          <a:prstGeom prst="rect">
+            <a:avLst/>
+          </a:prstGeom>
+          <a:noFill/>
+        </p:spPr>
+        <p:txBody>
+          <a:bodyPr wrap="square" anchor="t" lIns="0" rIns="0" tIns="0" bIns="0">
+            <a:spAutoFit/>
+          </a:bodyPr>
+          <a:lstStyle/>
+          <a:p>
+            <a:pPr algn="r"/>
+            <a:r>
+              <a:rPr sz="1100" b="1" i="0">
+                <a:solidFill>
+                  <a:srgbClr val="B4532A"/>
+                </a:solidFill>
+                <a:latin typeface="Calibri"/>
+              </a:rPr>
+              <a:t>17,00 €</a:t>
+            </a:r>
+          </a:p>
+        </p:txBody>
+      </p:sp>
+      <p:sp>
+        <p:nvSpPr>
+          <p:cNvPr id="21" name="Rounded Rectangle 20"/>
+          <p:cNvSpPr/>
+          <p:nvPr/>
+        </p:nvSpPr>
+        <p:spPr>
+          <a:xfrm>
+            <a:off x="1078992" y="5294376"/>
+            <a:ext cx="566928" cy="566928"/>
+          </a:xfrm>
+          <a:prstGeom prst="roundRect">
+            <a:avLst/>
+          </a:prstGeom>
+          <a:solidFill>
+            <a:srgbClr val="DB2777"/>
+          </a:solidFill>
+          <a:ln>
+            <a:noFill/>
+          </a:ln>
+          <a:effectLst/>
+        </p:spPr>
+        <p:style>
+          <a:lnRef idx="1">
+            <a:schemeClr val="accent1"/>
+          </a:lnRef>
+          <a:fillRef idx="3">
+            <a:schemeClr val="accent1"/>
+          </a:fillRef>
+          <a:effectRef idx="2">
+            <a:schemeClr val="accent1"/>
+          </a:effectRef>
+          <a:fontRef idx="minor">
+            <a:schemeClr val="lt1"/>
+          </a:fontRef>
+        </p:style>
+        <p:txBody>
+          <a:bodyPr rtlCol="0" anchor="ctr"/>
+          <a:lstStyle/>
+          <a:p>
+            <a:pPr algn="ctr"/>
+          </a:p>
+        </p:txBody>
+      </p:sp>
+      <p:sp>
+        <p:nvSpPr>
+          <p:cNvPr id="22" name="TextBox 21"/>
+          <p:cNvSpPr txBox="1"/>
+          <p:nvPr/>
+        </p:nvSpPr>
+        <p:spPr>
+          <a:xfrm>
+            <a:off x="1755648" y="5349240"/>
+            <a:ext cx="1371600" cy="274320"/>
+          </a:xfrm>
+          <a:prstGeom prst="rect">
+            <a:avLst/>
+          </a:prstGeom>
+          <a:noFill/>
+        </p:spPr>
+        <p:txBody>
+          <a:bodyPr wrap="square" anchor="t" lIns="0" rIns="0" tIns="0" bIns="0">
+            <a:spAutoFit/>
+          </a:bodyPr>
+          <a:lstStyle/>
+          <a:p>
+            <a:pPr algn="l"/>
+            <a:r>
+              <a:rPr sz="1200" b="1" i="0">
+                <a:solidFill>
+                  <a:srgbClr val="1E293B"/>
+                </a:solidFill>
+                <a:latin typeface="Calibri"/>
+              </a:rPr>
+              <a:t>Tarta de queso</a:t>
+            </a:r>
+          </a:p>
+        </p:txBody>
+      </p:sp>
+      <p:sp>
+        <p:nvSpPr>
+          <p:cNvPr id="23" name="TextBox 22"/>
+          <p:cNvSpPr txBox="1"/>
+          <p:nvPr/>
+        </p:nvSpPr>
+        <p:spPr>
+          <a:xfrm>
+            <a:off x="1755648" y="5605272"/>
+            <a:ext cx="1463040" cy="228600"/>
+          </a:xfrm>
+          <a:prstGeom prst="rect">
+            <a:avLst/>
+          </a:prstGeom>
+          <a:noFill/>
+        </p:spPr>
+        <p:txBody>
+          <a:bodyPr wrap="square" anchor="t" lIns="0" rIns="0" tIns="0" bIns="0">
+            <a:spAutoFit/>
+          </a:bodyPr>
+          <a:lstStyle/>
+          <a:p>
+            <a:pPr algn="l"/>
+            <a:r>
+              <a:rPr sz="850" b="0" i="0">
+                <a:solidFill>
+                  <a:srgbClr val="64748B"/>
+                </a:solidFill>
+                <a:latin typeface="Calibri"/>
+              </a:rPr>
+              <a:t>con foto y descripción</a:t>
+            </a:r>
+          </a:p>
+        </p:txBody>
+      </p:sp>
+      <p:sp>
+        <p:nvSpPr>
+          <p:cNvPr id="24" name="TextBox 23"/>
+          <p:cNvSpPr txBox="1"/>
+          <p:nvPr/>
+        </p:nvSpPr>
+        <p:spPr>
+          <a:xfrm>
+            <a:off x="2788920" y="5404104"/>
+            <a:ext cx="640080" cy="274320"/>
+          </a:xfrm>
+          <a:prstGeom prst="rect">
+            <a:avLst/>
+          </a:prstGeom>
+          <a:noFill/>
+        </p:spPr>
+        <p:txBody>
+          <a:bodyPr wrap="square" anchor="t" lIns="0" rIns="0" tIns="0" bIns="0">
+            <a:spAutoFit/>
+          </a:bodyPr>
+          <a:lstStyle/>
+          <a:p>
+            <a:pPr algn="r"/>
+            <a:r>
+              <a:rPr sz="1100" b="1" i="0">
+                <a:solidFill>
+                  <a:srgbClr val="B4532A"/>
+                </a:solidFill>
+                <a:latin typeface="Calibri"/>
+              </a:rPr>
+              <a:t>5,00 €</a:t>
+            </a:r>
+          </a:p>
+        </p:txBody>
+      </p:sp>
+      <p:sp>
+        <p:nvSpPr>
+          <p:cNvPr id="25" name="Rounded Rectangle 24"/>
+          <p:cNvSpPr/>
+          <p:nvPr/>
+        </p:nvSpPr>
+        <p:spPr>
+          <a:xfrm>
+            <a:off x="4297680" y="2020824"/>
+            <a:ext cx="146304" cy="146304"/>
+          </a:xfrm>
+          <a:prstGeom prst="roundRect">
+            <a:avLst/>
+          </a:prstGeom>
+          <a:solidFill>
+            <a:srgbClr val="14B8A6"/>
+          </a:solidFill>
+          <a:ln>
+            <a:noFill/>
+          </a:ln>
+          <a:effectLst/>
+        </p:spPr>
+        <p:style>
+          <a:lnRef idx="1">
+            <a:schemeClr val="accent1"/>
+          </a:lnRef>
+          <a:fillRef idx="3">
+            <a:schemeClr val="accent1"/>
+          </a:fillRef>
+          <a:effectRef idx="2">
+            <a:schemeClr val="accent1"/>
+          </a:effectRef>
+          <a:fontRef idx="minor">
+            <a:schemeClr val="lt1"/>
+          </a:fontRef>
+        </p:style>
+        <p:txBody>
+          <a:bodyPr rtlCol="0" anchor="ctr"/>
+          <a:lstStyle/>
+          <a:p>
+            <a:pPr algn="ctr"/>
+          </a:p>
+        </p:txBody>
+      </p:sp>
+      <p:sp>
+        <p:nvSpPr>
+          <p:cNvPr id="26" name="TextBox 25"/>
+          <p:cNvSpPr txBox="1"/>
+          <p:nvPr/>
+        </p:nvSpPr>
+        <p:spPr>
+          <a:xfrm>
+            <a:off x="4608576" y="1965960"/>
+            <a:ext cx="5120640" cy="457200"/>
+          </a:xfrm>
+          <a:prstGeom prst="rect">
+            <a:avLst/>
+          </a:prstGeom>
+          <a:noFill/>
+        </p:spPr>
+        <p:txBody>
+          <a:bodyPr wrap="square" anchor="t" lIns="0" rIns="0" tIns="0" bIns="0">
+            <a:spAutoFit/>
+          </a:bodyPr>
+          <a:lstStyle/>
+          <a:p>
+            <a:pPr algn="l"/>
+            <a:r>
+              <a:rPr sz="1450" b="0" i="0">
+                <a:solidFill>
+                  <a:srgbClr val="1E293B"/>
+                </a:solidFill>
+                <a:latin typeface="Calibri"/>
+              </a:rPr>
+              <a:t>Foto, descripción y precio en cada plato y bebida</a:t>
+            </a:r>
+          </a:p>
+        </p:txBody>
+      </p:sp>
+      <p:sp>
+        <p:nvSpPr>
+          <p:cNvPr id="27" name="Rounded Rectangle 26"/>
+          <p:cNvSpPr/>
+          <p:nvPr/>
+        </p:nvSpPr>
+        <p:spPr>
+          <a:xfrm>
+            <a:off x="4297680" y="2587752"/>
+            <a:ext cx="146304" cy="146304"/>
+          </a:xfrm>
+          <a:prstGeom prst="roundRect">
+            <a:avLst/>
+          </a:prstGeom>
+          <a:solidFill>
+            <a:srgbClr val="14B8A6"/>
+          </a:solidFill>
+          <a:ln>
+            <a:noFill/>
+          </a:ln>
+          <a:effectLst/>
+        </p:spPr>
+        <p:style>
+          <a:lnRef idx="1">
+            <a:schemeClr val="accent1"/>
+          </a:lnRef>
+          <a:fillRef idx="3">
+            <a:schemeClr val="accent1"/>
+          </a:fillRef>
+          <a:effectRef idx="2">
+            <a:schemeClr val="accent1"/>
+          </a:effectRef>
+          <a:fontRef idx="minor">
+            <a:schemeClr val="lt1"/>
+          </a:fontRef>
+        </p:style>
+        <p:txBody>
+          <a:bodyPr rtlCol="0" anchor="ctr"/>
+          <a:lstStyle/>
+          <a:p>
+            <a:pPr algn="ctr"/>
+          </a:p>
+        </p:txBody>
+      </p:sp>
+      <p:sp>
+        <p:nvSpPr>
+          <p:cNvPr id="28" name="TextBox 27"/>
+          <p:cNvSpPr txBox="1"/>
+          <p:nvPr/>
+        </p:nvSpPr>
+        <p:spPr>
+          <a:xfrm>
+            <a:off x="4608576" y="2532888"/>
+            <a:ext cx="5120640" cy="457200"/>
+          </a:xfrm>
+          <a:prstGeom prst="rect">
+            <a:avLst/>
+          </a:prstGeom>
+          <a:noFill/>
+        </p:spPr>
+        <p:txBody>
+          <a:bodyPr wrap="square" anchor="t" lIns="0" rIns="0" tIns="0" bIns="0">
+            <a:spAutoFit/>
+          </a:bodyPr>
+          <a:lstStyle/>
+          <a:p>
+            <a:pPr algn="l"/>
+            <a:r>
+              <a:rPr sz="1450" b="0" i="0">
+                <a:solidFill>
+                  <a:srgbClr val="1E293B"/>
+                </a:solidFill>
+                <a:latin typeface="Calibri"/>
+              </a:rPr>
+              <a:t>Se actualiza sola y en tiempo real — sin reimprimir</a:t>
+            </a:r>
+          </a:p>
+        </p:txBody>
+      </p:sp>
+      <p:sp>
+        <p:nvSpPr>
+          <p:cNvPr id="29" name="Rounded Rectangle 28"/>
+          <p:cNvSpPr/>
+          <p:nvPr/>
+        </p:nvSpPr>
+        <p:spPr>
+          <a:xfrm>
+            <a:off x="4297680" y="3154680"/>
+            <a:ext cx="146304" cy="146304"/>
+          </a:xfrm>
+          <a:prstGeom prst="roundRect">
+            <a:avLst/>
+          </a:prstGeom>
+          <a:solidFill>
+            <a:srgbClr val="14B8A6"/>
+          </a:solidFill>
+          <a:ln>
+            <a:noFill/>
+          </a:ln>
+          <a:effectLst/>
+        </p:spPr>
+        <p:style>
+          <a:lnRef idx="1">
+            <a:schemeClr val="accent1"/>
+          </a:lnRef>
+          <a:fillRef idx="3">
+            <a:schemeClr val="accent1"/>
+          </a:fillRef>
+          <a:effectRef idx="2">
+            <a:schemeClr val="accent1"/>
+          </a:effectRef>
+          <a:fontRef idx="minor">
+            <a:schemeClr val="lt1"/>
+          </a:fontRef>
+        </p:style>
+        <p:txBody>
+          <a:bodyPr rtlCol="0" anchor="ctr"/>
+          <a:lstStyle/>
+          <a:p>
+            <a:pPr algn="ctr"/>
+          </a:p>
+        </p:txBody>
+      </p:sp>
+      <p:sp>
+        <p:nvSpPr>
+          <p:cNvPr id="30" name="TextBox 29"/>
+          <p:cNvSpPr txBox="1"/>
+          <p:nvPr/>
+        </p:nvSpPr>
+        <p:spPr>
+          <a:xfrm>
+            <a:off x="4608576" y="3099816"/>
+            <a:ext cx="5120640" cy="457200"/>
+          </a:xfrm>
+          <a:prstGeom prst="rect">
+            <a:avLst/>
+          </a:prstGeom>
+          <a:noFill/>
+        </p:spPr>
+        <p:txBody>
+          <a:bodyPr wrap="square" anchor="t" lIns="0" rIns="0" tIns="0" bIns="0">
+            <a:spAutoFit/>
+          </a:bodyPr>
+          <a:lstStyle/>
+          <a:p>
+            <a:pPr algn="l"/>
+            <a:r>
+              <a:rPr sz="1450" b="0" i="0">
+                <a:solidFill>
+                  <a:srgbClr val="1E293B"/>
+                </a:solidFill>
+                <a:latin typeface="Calibri"/>
+              </a:rPr>
+              <a:t>Funciona sin internet, en la red del local</a:t>
+            </a:r>
+          </a:p>
+        </p:txBody>
+      </p:sp>
+      <p:sp>
+        <p:nvSpPr>
+          <p:cNvPr id="31" name="Rounded Rectangle 30"/>
+          <p:cNvSpPr/>
+          <p:nvPr/>
+        </p:nvSpPr>
+        <p:spPr>
+          <a:xfrm>
+            <a:off x="4297680" y="3721607"/>
+            <a:ext cx="146304" cy="146304"/>
+          </a:xfrm>
+          <a:prstGeom prst="roundRect">
+            <a:avLst/>
+          </a:prstGeom>
+          <a:solidFill>
+            <a:srgbClr val="14B8A6"/>
+          </a:solidFill>
+          <a:ln>
+            <a:noFill/>
+          </a:ln>
+          <a:effectLst/>
+        </p:spPr>
+        <p:style>
+          <a:lnRef idx="1">
+            <a:schemeClr val="accent1"/>
+          </a:lnRef>
+          <a:fillRef idx="3">
+            <a:schemeClr val="accent1"/>
+          </a:fillRef>
+          <a:effectRef idx="2">
+            <a:schemeClr val="accent1"/>
+          </a:effectRef>
+          <a:fontRef idx="minor">
+            <a:schemeClr val="lt1"/>
+          </a:fontRef>
+        </p:style>
+        <p:txBody>
+          <a:bodyPr rtlCol="0" anchor="ctr"/>
+          <a:lstStyle/>
+          <a:p>
+            <a:pPr algn="ctr"/>
+          </a:p>
+        </p:txBody>
+      </p:sp>
+      <p:sp>
+        <p:nvSpPr>
+          <p:cNvPr id="32" name="TextBox 31"/>
+          <p:cNvSpPr txBox="1"/>
+          <p:nvPr/>
+        </p:nvSpPr>
+        <p:spPr>
+          <a:xfrm>
+            <a:off x="4608576" y="3666744"/>
+            <a:ext cx="5120640" cy="457200"/>
+          </a:xfrm>
+          <a:prstGeom prst="rect">
+            <a:avLst/>
+          </a:prstGeom>
+          <a:noFill/>
+        </p:spPr>
+        <p:txBody>
+          <a:bodyPr wrap="square" anchor="t" lIns="0" rIns="0" tIns="0" bIns="0">
+            <a:spAutoFit/>
+          </a:bodyPr>
+          <a:lstStyle/>
+          <a:p>
+            <a:pPr algn="l"/>
+            <a:r>
+              <a:rPr sz="1450" b="0" i="0">
+                <a:solidFill>
+                  <a:srgbClr val="1E293B"/>
+                </a:solidFill>
+                <a:latin typeface="Calibri"/>
+              </a:rPr>
+              <a:t>El cliente reserva desde su móvil → entra en tu agenda</a:t>
+            </a:r>
+          </a:p>
+        </p:txBody>
+      </p:sp>
+      <p:sp>
+        <p:nvSpPr>
+          <p:cNvPr id="33" name="Rounded Rectangle 32"/>
+          <p:cNvSpPr/>
+          <p:nvPr/>
+        </p:nvSpPr>
+        <p:spPr>
+          <a:xfrm>
+            <a:off x="4297680" y="4480560"/>
+            <a:ext cx="1371600" cy="1371600"/>
+          </a:xfrm>
+          <a:prstGeom prst="roundRect">
+            <a:avLst/>
+          </a:prstGeom>
+          <a:solidFill>
+            <a:srgbClr val="FFFFFF"/>
+          </a:solidFill>
+          <a:ln w="12700">
+            <a:solidFill>
+              <a:srgbClr val="E2E8F0"/>
+            </a:solidFill>
+          </a:ln>
+          <a:effectLst/>
+        </p:spPr>
+        <p:style>
+          <a:lnRef idx="1">
+            <a:schemeClr val="accent1"/>
+          </a:lnRef>
+          <a:fillRef idx="3">
+            <a:schemeClr val="accent1"/>
+          </a:fillRef>
+          <a:effectRef idx="2">
+            <a:schemeClr val="accent1"/>
+          </a:effectRef>
+          <a:fontRef idx="minor">
+            <a:schemeClr val="lt1"/>
+          </a:fontRef>
+        </p:style>
+        <p:txBody>
+          <a:bodyPr rtlCol="0" anchor="ctr"/>
+          <a:lstStyle/>
+          <a:p>
+            <a:pPr algn="ctr"/>
+          </a:p>
+        </p:txBody>
+      </p:sp>
+      <p:sp>
+        <p:nvSpPr>
+          <p:cNvPr id="34" name="Rectangle 33"/>
+          <p:cNvSpPr/>
+          <p:nvPr/>
+        </p:nvSpPr>
+        <p:spPr>
+          <a:xfrm>
+            <a:off x="4443984" y="4626864"/>
+            <a:ext cx="310896" cy="310896"/>
+          </a:xfrm>
+          <a:prstGeom prst="rect">
+            <a:avLst/>
+          </a:prstGeom>
+          <a:solidFill>
+            <a:srgbClr val="1E293B"/>
+          </a:solidFill>
+          <a:ln>
+            <a:noFill/>
+          </a:ln>
+          <a:effectLst/>
+        </p:spPr>
+        <p:style>
+          <a:lnRef idx="1">
+            <a:schemeClr val="accent1"/>
+          </a:lnRef>
+          <a:fillRef idx="3">
+            <a:schemeClr val="accent1"/>
+          </a:fillRef>
+          <a:effectRef idx="2">
+            <a:schemeClr val="accent1"/>
+          </a:effectRef>
+          <a:fontRef idx="minor">
+            <a:schemeClr val="lt1"/>
+          </a:fontRef>
+        </p:style>
+        <p:txBody>
+          <a:bodyPr rtlCol="0" anchor="ctr"/>
+          <a:lstStyle/>
+          <a:p>
+            <a:pPr algn="ctr"/>
+          </a:p>
+        </p:txBody>
+      </p:sp>
+      <p:sp>
+        <p:nvSpPr>
+          <p:cNvPr id="35" name="Rectangle 34"/>
+          <p:cNvSpPr/>
+          <p:nvPr/>
+        </p:nvSpPr>
+        <p:spPr>
+          <a:xfrm>
+            <a:off x="4526280" y="4709160"/>
+            <a:ext cx="146304" cy="146304"/>
+          </a:xfrm>
+          <a:prstGeom prst="rect">
+            <a:avLst/>
+          </a:prstGeom>
+          <a:solidFill>
+            <a:srgbClr val="FFFFFF"/>
+          </a:solidFill>
+          <a:ln>
+            <a:noFill/>
+          </a:ln>
+          <a:effectLst/>
+        </p:spPr>
+        <p:style>
+          <a:lnRef idx="1">
+            <a:schemeClr val="accent1"/>
+          </a:lnRef>
+          <a:fillRef idx="3">
+            <a:schemeClr val="accent1"/>
+          </a:fillRef>
+          <a:effectRef idx="2">
+            <a:schemeClr val="accent1"/>
+          </a:effectRef>
+          <a:fontRef idx="minor">
+            <a:schemeClr val="lt1"/>
+          </a:fontRef>
+        </p:style>
+        <p:txBody>
+          <a:bodyPr rtlCol="0" anchor="ctr"/>
+          <a:lstStyle/>
+          <a:p>
+            <a:pPr algn="ctr"/>
+          </a:p>
+        </p:txBody>
+      </p:sp>
+      <p:sp>
+        <p:nvSpPr>
+          <p:cNvPr id="36" name="Rectangle 35"/>
+          <p:cNvSpPr/>
+          <p:nvPr/>
+        </p:nvSpPr>
+        <p:spPr>
+          <a:xfrm>
+            <a:off x="5212080" y="4626864"/>
+            <a:ext cx="310896" cy="310896"/>
+          </a:xfrm>
+          <a:prstGeom prst="rect">
+            <a:avLst/>
+          </a:prstGeom>
+          <a:solidFill>
+            <a:srgbClr val="1E293B"/>
+          </a:solidFill>
+          <a:ln>
+            <a:noFill/>
+          </a:ln>
+          <a:effectLst/>
+        </p:spPr>
+        <p:style>
+          <a:lnRef idx="1">
+            <a:schemeClr val="accent1"/>
+          </a:lnRef>
+          <a:fillRef idx="3">
+            <a:schemeClr val="accent1"/>
+          </a:fillRef>
+          <a:effectRef idx="2">
+            <a:schemeClr val="accent1"/>
+          </a:effectRef>
+          <a:fontRef idx="minor">
+            <a:schemeClr val="lt1"/>
+          </a:fontRef>
+        </p:style>
+        <p:txBody>
+          <a:bodyPr rtlCol="0" anchor="ctr"/>
+          <a:lstStyle/>
+          <a:p>
+            <a:pPr algn="ctr"/>
+          </a:p>
+        </p:txBody>
+      </p:sp>
+      <p:sp>
+        <p:nvSpPr>
+          <p:cNvPr id="37" name="Rectangle 36"/>
+          <p:cNvSpPr/>
+          <p:nvPr/>
+        </p:nvSpPr>
+        <p:spPr>
+          <a:xfrm>
+            <a:off x="5294376" y="4709160"/>
+            <a:ext cx="146304" cy="146304"/>
+          </a:xfrm>
+          <a:prstGeom prst="rect">
+            <a:avLst/>
+          </a:prstGeom>
+          <a:solidFill>
+            <a:srgbClr val="FFFFFF"/>
+          </a:solidFill>
+          <a:ln>
+            <a:noFill/>
+          </a:ln>
+          <a:effectLst/>
+        </p:spPr>
+        <p:style>
+          <a:lnRef idx="1">
+            <a:schemeClr val="accent1"/>
+          </a:lnRef>
+          <a:fillRef idx="3">
+            <a:schemeClr val="accent1"/>
+          </a:fillRef>
+          <a:effectRef idx="2">
+            <a:schemeClr val="accent1"/>
+          </a:effectRef>
+          <a:fontRef idx="minor">
+            <a:schemeClr val="lt1"/>
+          </a:fontRef>
+        </p:style>
+        <p:txBody>
+          <a:bodyPr rtlCol="0" anchor="ctr"/>
+          <a:lstStyle/>
+          <a:p>
+            <a:pPr algn="ctr"/>
+          </a:p>
+        </p:txBody>
+      </p:sp>
+      <p:sp>
+        <p:nvSpPr>
+          <p:cNvPr id="38" name="Rectangle 37"/>
+          <p:cNvSpPr/>
+          <p:nvPr/>
+        </p:nvSpPr>
+        <p:spPr>
+          <a:xfrm>
+            <a:off x="4443984" y="5394960"/>
+            <a:ext cx="310896" cy="310896"/>
+          </a:xfrm>
+          <a:prstGeom prst="rect">
+            <a:avLst/>
+          </a:prstGeom>
+          <a:solidFill>
+            <a:srgbClr val="1E293B"/>
+          </a:solidFill>
+          <a:ln>
+            <a:noFill/>
+          </a:ln>
+          <a:effectLst/>
+        </p:spPr>
+        <p:style>
+          <a:lnRef idx="1">
+            <a:schemeClr val="accent1"/>
+          </a:lnRef>
+          <a:fillRef idx="3">
+            <a:schemeClr val="accent1"/>
+          </a:fillRef>
+          <a:effectRef idx="2">
+            <a:schemeClr val="accent1"/>
+          </a:effectRef>
+          <a:fontRef idx="minor">
+            <a:schemeClr val="lt1"/>
+          </a:fontRef>
+        </p:style>
+        <p:txBody>
+          <a:bodyPr rtlCol="0" anchor="ctr"/>
+          <a:lstStyle/>
+          <a:p>
+            <a:pPr algn="ctr"/>
+          </a:p>
+        </p:txBody>
+      </p:sp>
+      <p:sp>
+        <p:nvSpPr>
+          <p:cNvPr id="39" name="Rectangle 38"/>
+          <p:cNvSpPr/>
+          <p:nvPr/>
+        </p:nvSpPr>
+        <p:spPr>
+          <a:xfrm>
+            <a:off x="4526280" y="5477256"/>
+            <a:ext cx="146304" cy="146304"/>
+          </a:xfrm>
+          <a:prstGeom prst="rect">
+            <a:avLst/>
+          </a:prstGeom>
+          <a:solidFill>
+            <a:srgbClr val="FFFFFF"/>
+          </a:solidFill>
+          <a:ln>
+            <a:noFill/>
+          </a:ln>
+          <a:effectLst/>
+        </p:spPr>
+        <p:style>
+          <a:lnRef idx="1">
+            <a:schemeClr val="accent1"/>
+          </a:lnRef>
+          <a:fillRef idx="3">
+            <a:schemeClr val="accent1"/>
+          </a:fillRef>
+          <a:effectRef idx="2">
+            <a:schemeClr val="accent1"/>
+          </a:effectRef>
+          <a:fontRef idx="minor">
+            <a:schemeClr val="lt1"/>
+          </a:fontRef>
+        </p:style>
+        <p:txBody>
+          <a:bodyPr rtlCol="0" anchor="ctr"/>
+          <a:lstStyle/>
+          <a:p>
+            <a:pPr algn="ctr"/>
+          </a:p>
+        </p:txBody>
+      </p:sp>
+      <p:sp>
+        <p:nvSpPr>
+          <p:cNvPr id="40" name="Rectangle 39"/>
+          <p:cNvSpPr/>
+          <p:nvPr/>
+        </p:nvSpPr>
+        <p:spPr>
+          <a:xfrm>
+            <a:off x="5084064" y="5029200"/>
+            <a:ext cx="82296" cy="82296"/>
+          </a:xfrm>
+          <a:prstGeom prst="rect">
+            <a:avLst/>
+          </a:prstGeom>
+          <a:solidFill>
+            <a:srgbClr val="1E293B"/>
+          </a:solidFill>
+          <a:ln>
+            <a:noFill/>
+          </a:ln>
+          <a:effectLst/>
+        </p:spPr>
+        <p:style>
+          <a:lnRef idx="1">
+            <a:schemeClr val="accent1"/>
+          </a:lnRef>
+          <a:fillRef idx="3">
+            <a:schemeClr val="accent1"/>
+          </a:fillRef>
+          <a:effectRef idx="2">
+            <a:schemeClr val="accent1"/>
+          </a:effectRef>
+          <a:fontRef idx="minor">
+            <a:schemeClr val="lt1"/>
+          </a:fontRef>
+        </p:style>
+        <p:txBody>
+          <a:bodyPr rtlCol="0" anchor="ctr"/>
+          <a:lstStyle/>
+          <a:p>
+            <a:pPr algn="ctr"/>
+          </a:p>
+        </p:txBody>
+      </p:sp>
+      <p:sp>
+        <p:nvSpPr>
+          <p:cNvPr id="41" name="Rectangle 40"/>
+          <p:cNvSpPr/>
+          <p:nvPr/>
+        </p:nvSpPr>
+        <p:spPr>
+          <a:xfrm>
+            <a:off x="5321808" y="5029200"/>
+            <a:ext cx="82296" cy="82296"/>
+          </a:xfrm>
+          <a:prstGeom prst="rect">
+            <a:avLst/>
+          </a:prstGeom>
+          <a:solidFill>
+            <a:srgbClr val="1E293B"/>
+          </a:solidFill>
+          <a:ln>
+            <a:noFill/>
+          </a:ln>
+          <a:effectLst/>
+        </p:spPr>
+        <p:style>
+          <a:lnRef idx="1">
+            <a:schemeClr val="accent1"/>
+          </a:lnRef>
+          <a:fillRef idx="3">
+            <a:schemeClr val="accent1"/>
+          </a:fillRef>
+          <a:effectRef idx="2">
+            <a:schemeClr val="accent1"/>
+          </a:effectRef>
+          <a:fontRef idx="minor">
+            <a:schemeClr val="lt1"/>
+          </a:fontRef>
+        </p:style>
+        <p:txBody>
+          <a:bodyPr rtlCol="0" anchor="ctr"/>
+          <a:lstStyle/>
+          <a:p>
+            <a:pPr algn="ctr"/>
+          </a:p>
+        </p:txBody>
+      </p:sp>
+      <p:sp>
+        <p:nvSpPr>
+          <p:cNvPr id="42" name="Rectangle 41"/>
+          <p:cNvSpPr/>
+          <p:nvPr/>
+        </p:nvSpPr>
+        <p:spPr>
+          <a:xfrm>
+            <a:off x="4965192" y="5148072"/>
+            <a:ext cx="82296" cy="82296"/>
+          </a:xfrm>
+          <a:prstGeom prst="rect">
+            <a:avLst/>
+          </a:prstGeom>
+          <a:solidFill>
+            <a:srgbClr val="1E293B"/>
+          </a:solidFill>
+          <a:ln>
+            <a:noFill/>
+          </a:ln>
+          <a:effectLst/>
+        </p:spPr>
+        <p:style>
+          <a:lnRef idx="1">
+            <a:schemeClr val="accent1"/>
+          </a:lnRef>
+          <a:fillRef idx="3">
+            <a:schemeClr val="accent1"/>
+          </a:fillRef>
+          <a:effectRef idx="2">
+            <a:schemeClr val="accent1"/>
+          </a:effectRef>
+          <a:fontRef idx="minor">
+            <a:schemeClr val="lt1"/>
+          </a:fontRef>
+        </p:style>
+        <p:txBody>
+          <a:bodyPr rtlCol="0" anchor="ctr"/>
+          <a:lstStyle/>
+          <a:p>
+            <a:pPr algn="ctr"/>
+          </a:p>
+        </p:txBody>
+      </p:sp>
+      <p:sp>
+        <p:nvSpPr>
+          <p:cNvPr id="43" name="Rectangle 42"/>
+          <p:cNvSpPr/>
+          <p:nvPr/>
+        </p:nvSpPr>
+        <p:spPr>
+          <a:xfrm>
+            <a:off x="4965192" y="5266944"/>
+            <a:ext cx="82296" cy="82296"/>
+          </a:xfrm>
+          <a:prstGeom prst="rect">
+            <a:avLst/>
+          </a:prstGeom>
+          <a:solidFill>
+            <a:srgbClr val="1E293B"/>
+          </a:solidFill>
+          <a:ln>
+            <a:noFill/>
+          </a:ln>
+          <a:effectLst/>
+        </p:spPr>
+        <p:style>
+          <a:lnRef idx="1">
+            <a:schemeClr val="accent1"/>
+          </a:lnRef>
+          <a:fillRef idx="3">
+            <a:schemeClr val="accent1"/>
+          </a:fillRef>
+          <a:effectRef idx="2">
+            <a:schemeClr val="accent1"/>
+          </a:effectRef>
+          <a:fontRef idx="minor">
+            <a:schemeClr val="lt1"/>
+          </a:fontRef>
+        </p:style>
+        <p:txBody>
+          <a:bodyPr rtlCol="0" anchor="ctr"/>
+          <a:lstStyle/>
+          <a:p>
+            <a:pPr algn="ctr"/>
+          </a:p>
+        </p:txBody>
+      </p:sp>
+      <p:sp>
+        <p:nvSpPr>
+          <p:cNvPr id="44" name="Rectangle 43"/>
+          <p:cNvSpPr/>
+          <p:nvPr/>
+        </p:nvSpPr>
+        <p:spPr>
+          <a:xfrm>
+            <a:off x="5321808" y="5266944"/>
+            <a:ext cx="82296" cy="82296"/>
+          </a:xfrm>
+          <a:prstGeom prst="rect">
+            <a:avLst/>
+          </a:prstGeom>
+          <a:solidFill>
+            <a:srgbClr val="1E293B"/>
+          </a:solidFill>
+          <a:ln>
+            <a:noFill/>
+          </a:ln>
+          <a:effectLst/>
+        </p:spPr>
+        <p:style>
+          <a:lnRef idx="1">
+            <a:schemeClr val="accent1"/>
+          </a:lnRef>
+          <a:fillRef idx="3">
+            <a:schemeClr val="accent1"/>
+          </a:fillRef>
+          <a:effectRef idx="2">
+            <a:schemeClr val="accent1"/>
+          </a:effectRef>
+          <a:fontRef idx="minor">
+            <a:schemeClr val="lt1"/>
+          </a:fontRef>
+        </p:style>
+        <p:txBody>
+          <a:bodyPr rtlCol="0" anchor="ctr"/>
+          <a:lstStyle/>
+          <a:p>
+            <a:pPr algn="ctr"/>
+          </a:p>
+        </p:txBody>
+      </p:sp>
+      <p:sp>
+        <p:nvSpPr>
+          <p:cNvPr id="45" name="Rectangle 44"/>
+          <p:cNvSpPr/>
+          <p:nvPr/>
+        </p:nvSpPr>
+        <p:spPr>
+          <a:xfrm>
+            <a:off x="5440680" y="5266944"/>
+            <a:ext cx="82296" cy="82296"/>
+          </a:xfrm>
+          <a:prstGeom prst="rect">
+            <a:avLst/>
+          </a:prstGeom>
+          <a:solidFill>
+            <a:srgbClr val="1E293B"/>
+          </a:solidFill>
+          <a:ln>
+            <a:noFill/>
+          </a:ln>
+          <a:effectLst/>
+        </p:spPr>
+        <p:style>
+          <a:lnRef idx="1">
+            <a:schemeClr val="accent1"/>
+          </a:lnRef>
+          <a:fillRef idx="3">
+            <a:schemeClr val="accent1"/>
+          </a:fillRef>
+          <a:effectRef idx="2">
+            <a:schemeClr val="accent1"/>
+          </a:effectRef>
+          <a:fontRef idx="minor">
+            <a:schemeClr val="lt1"/>
+          </a:fontRef>
+        </p:style>
+        <p:txBody>
+          <a:bodyPr rtlCol="0" anchor="ctr"/>
+          <a:lstStyle/>
+          <a:p>
+            <a:pPr algn="ctr"/>
+          </a:p>
+        </p:txBody>
+      </p:sp>
+      <p:sp>
+        <p:nvSpPr>
+          <p:cNvPr id="46" name="Rectangle 45"/>
+          <p:cNvSpPr/>
+          <p:nvPr/>
+        </p:nvSpPr>
+        <p:spPr>
+          <a:xfrm>
+            <a:off x="4846320" y="5385816"/>
+            <a:ext cx="82296" cy="82296"/>
+          </a:xfrm>
+          <a:prstGeom prst="rect">
+            <a:avLst/>
+          </a:prstGeom>
+          <a:solidFill>
+            <a:srgbClr val="1E293B"/>
+          </a:solidFill>
+          <a:ln>
+            <a:noFill/>
+          </a:ln>
+          <a:effectLst/>
+        </p:spPr>
+        <p:style>
+          <a:lnRef idx="1">
+            <a:schemeClr val="accent1"/>
+          </a:lnRef>
+          <a:fillRef idx="3">
+            <a:schemeClr val="accent1"/>
+          </a:fillRef>
+          <a:effectRef idx="2">
+            <a:schemeClr val="accent1"/>
+          </a:effectRef>
+          <a:fontRef idx="minor">
+            <a:schemeClr val="lt1"/>
+          </a:fontRef>
+        </p:style>
+        <p:txBody>
+          <a:bodyPr rtlCol="0" anchor="ctr"/>
+          <a:lstStyle/>
+          <a:p>
+            <a:pPr algn="ctr"/>
+          </a:p>
+        </p:txBody>
+      </p:sp>
+      <p:sp>
+        <p:nvSpPr>
+          <p:cNvPr id="47" name="Rectangle 46"/>
+          <p:cNvSpPr/>
+          <p:nvPr/>
+        </p:nvSpPr>
+        <p:spPr>
+          <a:xfrm>
+            <a:off x="5084064" y="5385816"/>
+            <a:ext cx="82296" cy="82296"/>
+          </a:xfrm>
+          <a:prstGeom prst="rect">
+            <a:avLst/>
+          </a:prstGeom>
+          <a:solidFill>
+            <a:srgbClr val="1E293B"/>
+          </a:solidFill>
+          <a:ln>
+            <a:noFill/>
+          </a:ln>
+          <a:effectLst/>
+        </p:spPr>
+        <p:style>
+          <a:lnRef idx="1">
+            <a:schemeClr val="accent1"/>
+          </a:lnRef>
+          <a:fillRef idx="3">
+            <a:schemeClr val="accent1"/>
+          </a:fillRef>
+          <a:effectRef idx="2">
+            <a:schemeClr val="accent1"/>
+          </a:effectRef>
+          <a:fontRef idx="minor">
+            <a:schemeClr val="lt1"/>
+          </a:fontRef>
+        </p:style>
+        <p:txBody>
+          <a:bodyPr rtlCol="0" anchor="ctr"/>
+          <a:lstStyle/>
+          <a:p>
+            <a:pPr algn="ctr"/>
+          </a:p>
+        </p:txBody>
+      </p:sp>
+      <p:sp>
+        <p:nvSpPr>
+          <p:cNvPr id="48" name="TextBox 47"/>
+          <p:cNvSpPr txBox="1"/>
+          <p:nvPr/>
+        </p:nvSpPr>
+        <p:spPr>
+          <a:xfrm>
+            <a:off x="5943600" y="4663440"/>
+            <a:ext cx="4572000" cy="457200"/>
+          </a:xfrm>
+          <a:prstGeom prst="rect">
+            <a:avLst/>
+          </a:prstGeom>
+          <a:noFill/>
+        </p:spPr>
+        <p:txBody>
+          <a:bodyPr wrap="square" anchor="t" lIns="0" rIns="0" tIns="0" bIns="0">
+            <a:spAutoFit/>
+          </a:bodyPr>
+          <a:lstStyle/>
+          <a:p>
+            <a:pPr algn="l"/>
+            <a:r>
+              <a:rPr sz="1500" b="1" i="0">
+                <a:solidFill>
+                  <a:srgbClr val="1E293B"/>
+                </a:solidFill>
+                <a:latin typeface="Calibri"/>
+              </a:rPr>
+              <a:t>Imprime el QR para cada mesa</a:t>
+            </a:r>
+          </a:p>
+        </p:txBody>
+      </p:sp>
+      <p:sp>
+        <p:nvSpPr>
+          <p:cNvPr id="49" name="TextBox 48"/>
+          <p:cNvSpPr txBox="1"/>
+          <p:nvPr/>
+        </p:nvSpPr>
+        <p:spPr>
+          <a:xfrm>
+            <a:off x="5943600" y="5047488"/>
+            <a:ext cx="4572000" cy="640080"/>
+          </a:xfrm>
+          <a:prstGeom prst="rect">
+            <a:avLst/>
+          </a:prstGeom>
+          <a:noFill/>
+        </p:spPr>
+        <p:txBody>
+          <a:bodyPr wrap="square" anchor="t" lIns="0" rIns="0" tIns="0" bIns="0">
+            <a:spAutoFit/>
+          </a:bodyPr>
+          <a:lstStyle/>
+          <a:p>
+            <a:pPr algn="l"/>
+            <a:r>
+              <a:rPr sz="1250" b="0" i="0">
+                <a:solidFill>
+                  <a:srgbClr val="64748B"/>
+                </a:solidFill>
+                <a:latin typeface="Calibri"/>
+              </a:rPr>
+              <a:t>Lo escanean y ven la carta al instante. Incluido un expositor de mesa listo para imprimir.</a:t>
+            </a:r>
+          </a:p>
+        </p:txBody>
+      </p:sp>
+      <p:sp>
+        <p:nvSpPr>
+          <p:cNvPr id="50" name="TextBox 49"/>
+          <p:cNvSpPr txBox="1"/>
+          <p:nvPr/>
+        </p:nvSpPr>
+        <p:spPr>
+          <a:xfrm>
+            <a:off x="640080" y="6455664"/>
+            <a:ext cx="10972800" cy="274320"/>
+          </a:xfrm>
+          <a:prstGeom prst="rect">
+            <a:avLst/>
+          </a:prstGeom>
+          <a:noFill/>
+        </p:spPr>
+        <p:txBody>
+          <a:bodyPr wrap="square" anchor="t" lIns="0" rIns="0" tIns="0" bIns="0">
+            <a:spAutoFit/>
+          </a:bodyPr>
+          <a:lstStyle/>
+          <a:p>
+            <a:pPr algn="l"/>
             <a:r>
               <a:rPr sz="900" b="0" i="0">
                 <a:solidFill>
